--- a/TETRIS_발표.pptx
+++ b/TETRIS_발표.pptx
@@ -1,22 +1,22 @@
 
 <file path=ppt/presentation.xml><?xml version="1.0" encoding="utf-8"?>
-<p:presentation xmlns:r="http://schemas.openxmlformats.org/officeDocument/2006/relationships" xmlns:c="http://schemas.openxmlformats.org/drawingml/2006/chart" xmlns:a="http://schemas.openxmlformats.org/drawingml/2006/main" xmlns:dgm="http://schemas.openxmlformats.org/drawingml/2006/diagram" xmlns:dsp="http://schemas.microsoft.com/office/drawing/2008/diagram" xmlns:p="http://schemas.openxmlformats.org/presentationml/2006/main" autoCompressPictures="0">
+<p:presentation xmlns:a="http://schemas.openxmlformats.org/drawingml/2006/main" xmlns:r="http://schemas.openxmlformats.org/officeDocument/2006/relationships" xmlns:p="http://schemas.openxmlformats.org/presentationml/2006/main" autoCompressPictures="0">
   <p:sldMasterIdLst>
     <p:sldMasterId id="2147483656" r:id="rId1"/>
   </p:sldMasterIdLst>
   <p:notesMasterIdLst>
-    <p:notesMasterId r:id="rId2"/>
+    <p:notesMasterId r:id="rId11"/>
   </p:notesMasterIdLst>
   <p:sldIdLst>
-    <p:sldId id="256" r:id="rId3"/>
-    <p:sldId id="257" r:id="rId4"/>
-    <p:sldId id="258" r:id="rId5"/>
-    <p:sldId id="259" r:id="rId6"/>
-    <p:sldId id="260" r:id="rId7"/>
-    <p:sldId id="261" r:id="rId8"/>
-    <p:sldId id="262" r:id="rId9"/>
-    <p:sldId id="263" r:id="rId10"/>
-    <p:sldId id="264" r:id="rId11"/>
+    <p:sldId id="256" r:id="rId2"/>
+    <p:sldId id="257" r:id="rId3"/>
+    <p:sldId id="258" r:id="rId4"/>
+    <p:sldId id="259" r:id="rId5"/>
+    <p:sldId id="260" r:id="rId6"/>
+    <p:sldId id="261" r:id="rId7"/>
+    <p:sldId id="262" r:id="rId8"/>
+    <p:sldId id="263" r:id="rId9"/>
+    <p:sldId id="264" r:id="rId10"/>
   </p:sldIdLst>
   <p:sldSz cx="12192000" cy="6858000"/>
   <p:notesSz cx="6858000" cy="12192000"/>
@@ -112,11 +112,16 @@
       </a:defRPr>
     </a:lvl9pPr>
   </p:defaultTextStyle>
+  <p:extLst>
+    <p:ext uri="{EFAFB233-063F-42B5-8137-9DF3F51BA10A}">
+      <p15:sldGuideLst xmlns:p15="http://schemas.microsoft.com/office/powerpoint/2012/main"/>
+    </p:ext>
+  </p:extLst>
 </p:presentation>
 </file>
 
 <file path=ppt/notesMasters/notesMaster1.xml><?xml version="1.0" encoding="utf-8"?>
-<p:notesMaster xmlns:r="http://schemas.openxmlformats.org/officeDocument/2006/relationships" xmlns:c="http://schemas.openxmlformats.org/drawingml/2006/chart" xmlns:a="http://schemas.openxmlformats.org/drawingml/2006/main" xmlns:dgm="http://schemas.openxmlformats.org/drawingml/2006/diagram" xmlns:dsp="http://schemas.microsoft.com/office/drawing/2008/diagram" xmlns:p="http://schemas.openxmlformats.org/presentationml/2006/main">
+<p:notesMaster xmlns:a="http://schemas.openxmlformats.org/drawingml/2006/main" xmlns:r="http://schemas.openxmlformats.org/officeDocument/2006/relationships" xmlns:p="http://schemas.openxmlformats.org/presentationml/2006/main">
   <p:cSld>
     <p:bg>
       <p:bgRef idx="1001">
@@ -144,7 +149,7 @@
             <a:spLocks noGrp="1"/>
           </p:cNvSpPr>
           <p:nvPr>
-            <p:ph type="hdr" sz="quarter" idx="0"/>
+            <p:ph type="hdr" sz="quarter"/>
           </p:nvPr>
         </p:nvSpPr>
         <p:spPr>
@@ -167,10 +172,6 @@
             <a:pPr lvl="0">
               <a:defRPr/>
             </a:pPr>
-            <a:r>
-              <a:rPr lang="ko-KR" altLang="en-US"/>
-              <a:t/>
-            </a:r>
             <a:endParaRPr lang="ko-KR" altLang="en-US"/>
           </a:p>
         </p:txBody>
@@ -210,7 +211,7 @@
               <a:pPr lvl="0">
                 <a:defRPr/>
               </a:pPr>
-              <a:t>6/17/2026</a:t>
+              <a:t>6/18/2026</a:t>
             </a:fld>
             <a:endParaRPr lang="en-US"/>
           </a:p>
@@ -282,7 +283,6 @@
               <a:rPr lang="en-US"/>
               <a:t>Click to edit Master text styles</a:t>
             </a:r>
-            <a:endParaRPr lang="en-US"/>
           </a:p>
           <a:p>
             <a:pPr lvl="1">
@@ -292,7 +292,6 @@
               <a:rPr lang="en-US"/>
               <a:t>Second level</a:t>
             </a:r>
-            <a:endParaRPr lang="en-US"/>
           </a:p>
           <a:p>
             <a:pPr lvl="2">
@@ -302,7 +301,6 @@
               <a:rPr lang="en-US"/>
               <a:t>Third level</a:t>
             </a:r>
-            <a:endParaRPr lang="en-US"/>
           </a:p>
           <a:p>
             <a:pPr lvl="3">
@@ -312,7 +310,6 @@
               <a:rPr lang="en-US"/>
               <a:t>Fourth level</a:t>
             </a:r>
-            <a:endParaRPr lang="en-US"/>
           </a:p>
           <a:p>
             <a:pPr lvl="4">
@@ -322,7 +319,6 @@
               <a:rPr lang="en-US"/>
               <a:t>Fifth level</a:t>
             </a:r>
-            <a:endParaRPr lang="en-US"/>
           </a:p>
         </p:txBody>
       </p:sp>
@@ -356,10 +352,6 @@
             <a:pPr lvl="0">
               <a:defRPr/>
             </a:pPr>
-            <a:r>
-              <a:rPr lang="ko-KR" altLang="en-US"/>
-              <a:t/>
-            </a:r>
             <a:endParaRPr lang="ko-KR" altLang="en-US"/>
           </a:p>
         </p:txBody>
@@ -505,7 +497,7 @@
 </file>
 
 <file path=ppt/notesSlides/notesSlide1.xml><?xml version="1.0" encoding="utf-8"?>
-<p:notes xmlns:r="http://schemas.openxmlformats.org/officeDocument/2006/relationships" xmlns:c="http://schemas.openxmlformats.org/drawingml/2006/chart" xmlns:a="http://schemas.openxmlformats.org/drawingml/2006/main" xmlns:dgm="http://schemas.openxmlformats.org/drawingml/2006/diagram" xmlns:dsp="http://schemas.microsoft.com/office/drawing/2008/diagram" xmlns:p="http://schemas.openxmlformats.org/presentationml/2006/main">
+<p:notes xmlns:a="http://schemas.openxmlformats.org/drawingml/2006/main" xmlns:r="http://schemas.openxmlformats.org/officeDocument/2006/relationships" xmlns:p="http://schemas.openxmlformats.org/presentationml/2006/main">
   <p:cSld>
     <p:spTree>
       <p:nvGrpSpPr>
@@ -528,7 +520,7 @@
             <a:spLocks noGrp="1" noRot="1" noChangeAspect="1" noTextEdit="1"/>
           </p:cNvSpPr>
           <p:nvPr>
-            <p:ph type="sldImg" idx="0"/>
+            <p:ph type="sldImg"/>
           </p:nvPr>
         </p:nvSpPr>
         <p:spPr/>
@@ -551,10 +543,6 @@
             <a:pPr lvl="0">
               <a:defRPr/>
             </a:pPr>
-            <a:r>
-              <a:rPr lang="ko-KR" altLang="en-US"/>
-              <a:t/>
-            </a:r>
             <a:endParaRPr lang="ko-KR" altLang="en-US"/>
           </a:p>
         </p:txBody>
@@ -597,7 +585,7 @@
 </file>
 
 <file path=ppt/notesSlides/notesSlide2.xml><?xml version="1.0" encoding="utf-8"?>
-<p:notes xmlns:r="http://schemas.openxmlformats.org/officeDocument/2006/relationships" xmlns:c="http://schemas.openxmlformats.org/drawingml/2006/chart" xmlns:a="http://schemas.openxmlformats.org/drawingml/2006/main" xmlns:dgm="http://schemas.openxmlformats.org/drawingml/2006/diagram" xmlns:dsp="http://schemas.microsoft.com/office/drawing/2008/diagram" xmlns:p="http://schemas.openxmlformats.org/presentationml/2006/main">
+<p:notes xmlns:a="http://schemas.openxmlformats.org/drawingml/2006/main" xmlns:r="http://schemas.openxmlformats.org/officeDocument/2006/relationships" xmlns:p="http://schemas.openxmlformats.org/presentationml/2006/main">
   <p:cSld>
     <p:spTree>
       <p:nvGrpSpPr>
@@ -620,7 +608,7 @@
             <a:spLocks noGrp="1" noRot="1" noChangeAspect="1" noTextEdit="1"/>
           </p:cNvSpPr>
           <p:nvPr>
-            <p:ph type="sldImg" idx="0"/>
+            <p:ph type="sldImg"/>
           </p:nvPr>
         </p:nvSpPr>
         <p:spPr/>
@@ -643,10 +631,6 @@
             <a:pPr lvl="0">
               <a:defRPr/>
             </a:pPr>
-            <a:r>
-              <a:rPr lang="ko-KR" altLang="en-US"/>
-              <a:t/>
-            </a:r>
             <a:endParaRPr lang="ko-KR" altLang="en-US"/>
           </a:p>
         </p:txBody>
@@ -689,7 +673,7 @@
 </file>
 
 <file path=ppt/notesSlides/notesSlide3.xml><?xml version="1.0" encoding="utf-8"?>
-<p:notes xmlns:r="http://schemas.openxmlformats.org/officeDocument/2006/relationships" xmlns:c="http://schemas.openxmlformats.org/drawingml/2006/chart" xmlns:a="http://schemas.openxmlformats.org/drawingml/2006/main" xmlns:dgm="http://schemas.openxmlformats.org/drawingml/2006/diagram" xmlns:dsp="http://schemas.microsoft.com/office/drawing/2008/diagram" xmlns:p="http://schemas.openxmlformats.org/presentationml/2006/main">
+<p:notes xmlns:a="http://schemas.openxmlformats.org/drawingml/2006/main" xmlns:r="http://schemas.openxmlformats.org/officeDocument/2006/relationships" xmlns:p="http://schemas.openxmlformats.org/presentationml/2006/main">
   <p:cSld>
     <p:spTree>
       <p:nvGrpSpPr>
@@ -712,7 +696,7 @@
             <a:spLocks noGrp="1" noRot="1" noChangeAspect="1" noTextEdit="1"/>
           </p:cNvSpPr>
           <p:nvPr>
-            <p:ph type="sldImg" idx="0"/>
+            <p:ph type="sldImg"/>
           </p:nvPr>
         </p:nvSpPr>
         <p:spPr/>
@@ -735,10 +719,6 @@
             <a:pPr lvl="0">
               <a:defRPr/>
             </a:pPr>
-            <a:r>
-              <a:rPr lang="ko-KR" altLang="en-US"/>
-              <a:t/>
-            </a:r>
             <a:endParaRPr lang="ko-KR" altLang="en-US"/>
           </a:p>
         </p:txBody>
@@ -781,7 +761,7 @@
 </file>
 
 <file path=ppt/notesSlides/notesSlide4.xml><?xml version="1.0" encoding="utf-8"?>
-<p:notes xmlns:r="http://schemas.openxmlformats.org/officeDocument/2006/relationships" xmlns:c="http://schemas.openxmlformats.org/drawingml/2006/chart" xmlns:a="http://schemas.openxmlformats.org/drawingml/2006/main" xmlns:dgm="http://schemas.openxmlformats.org/drawingml/2006/diagram" xmlns:dsp="http://schemas.microsoft.com/office/drawing/2008/diagram" xmlns:p="http://schemas.openxmlformats.org/presentationml/2006/main">
+<p:notes xmlns:a="http://schemas.openxmlformats.org/drawingml/2006/main" xmlns:r="http://schemas.openxmlformats.org/officeDocument/2006/relationships" xmlns:p="http://schemas.openxmlformats.org/presentationml/2006/main">
   <p:cSld>
     <p:spTree>
       <p:nvGrpSpPr>
@@ -804,7 +784,7 @@
             <a:spLocks noGrp="1" noRot="1" noChangeAspect="1" noTextEdit="1"/>
           </p:cNvSpPr>
           <p:nvPr>
-            <p:ph type="sldImg" idx="0"/>
+            <p:ph type="sldImg"/>
           </p:nvPr>
         </p:nvSpPr>
         <p:spPr/>
@@ -827,10 +807,6 @@
             <a:pPr lvl="0">
               <a:defRPr/>
             </a:pPr>
-            <a:r>
-              <a:rPr lang="ko-KR" altLang="en-US"/>
-              <a:t/>
-            </a:r>
             <a:endParaRPr lang="ko-KR" altLang="en-US"/>
           </a:p>
         </p:txBody>
@@ -873,7 +849,7 @@
 </file>
 
 <file path=ppt/notesSlides/notesSlide5.xml><?xml version="1.0" encoding="utf-8"?>
-<p:notes xmlns:r="http://schemas.openxmlformats.org/officeDocument/2006/relationships" xmlns:c="http://schemas.openxmlformats.org/drawingml/2006/chart" xmlns:a="http://schemas.openxmlformats.org/drawingml/2006/main" xmlns:dgm="http://schemas.openxmlformats.org/drawingml/2006/diagram" xmlns:dsp="http://schemas.microsoft.com/office/drawing/2008/diagram" xmlns:p="http://schemas.openxmlformats.org/presentationml/2006/main">
+<p:notes xmlns:a="http://schemas.openxmlformats.org/drawingml/2006/main" xmlns:r="http://schemas.openxmlformats.org/officeDocument/2006/relationships" xmlns:p="http://schemas.openxmlformats.org/presentationml/2006/main">
   <p:cSld>
     <p:spTree>
       <p:nvGrpSpPr>
@@ -896,7 +872,7 @@
             <a:spLocks noGrp="1" noRot="1" noChangeAspect="1" noTextEdit="1"/>
           </p:cNvSpPr>
           <p:nvPr>
-            <p:ph type="sldImg" idx="0"/>
+            <p:ph type="sldImg"/>
           </p:nvPr>
         </p:nvSpPr>
         <p:spPr/>
@@ -919,10 +895,6 @@
             <a:pPr lvl="0">
               <a:defRPr/>
             </a:pPr>
-            <a:r>
-              <a:rPr lang="ko-KR" altLang="en-US"/>
-              <a:t/>
-            </a:r>
             <a:endParaRPr lang="ko-KR" altLang="en-US"/>
           </a:p>
         </p:txBody>
@@ -965,7 +937,7 @@
 </file>
 
 <file path=ppt/notesSlides/notesSlide6.xml><?xml version="1.0" encoding="utf-8"?>
-<p:notes xmlns:r="http://schemas.openxmlformats.org/officeDocument/2006/relationships" xmlns:c="http://schemas.openxmlformats.org/drawingml/2006/chart" xmlns:a="http://schemas.openxmlformats.org/drawingml/2006/main" xmlns:dgm="http://schemas.openxmlformats.org/drawingml/2006/diagram" xmlns:dsp="http://schemas.microsoft.com/office/drawing/2008/diagram" xmlns:p="http://schemas.openxmlformats.org/presentationml/2006/main">
+<p:notes xmlns:a="http://schemas.openxmlformats.org/drawingml/2006/main" xmlns:r="http://schemas.openxmlformats.org/officeDocument/2006/relationships" xmlns:p="http://schemas.openxmlformats.org/presentationml/2006/main">
   <p:cSld>
     <p:spTree>
       <p:nvGrpSpPr>
@@ -988,7 +960,7 @@
             <a:spLocks noGrp="1" noRot="1" noChangeAspect="1" noTextEdit="1"/>
           </p:cNvSpPr>
           <p:nvPr>
-            <p:ph type="sldImg" idx="0"/>
+            <p:ph type="sldImg"/>
           </p:nvPr>
         </p:nvSpPr>
         <p:spPr/>
@@ -1011,10 +983,6 @@
             <a:pPr lvl="0">
               <a:defRPr/>
             </a:pPr>
-            <a:r>
-              <a:rPr lang="ko-KR" altLang="en-US"/>
-              <a:t/>
-            </a:r>
             <a:endParaRPr lang="ko-KR" altLang="en-US"/>
           </a:p>
         </p:txBody>
@@ -1057,7 +1025,7 @@
 </file>
 
 <file path=ppt/notesSlides/notesSlide7.xml><?xml version="1.0" encoding="utf-8"?>
-<p:notes xmlns:r="http://schemas.openxmlformats.org/officeDocument/2006/relationships" xmlns:c="http://schemas.openxmlformats.org/drawingml/2006/chart" xmlns:a="http://schemas.openxmlformats.org/drawingml/2006/main" xmlns:dgm="http://schemas.openxmlformats.org/drawingml/2006/diagram" xmlns:dsp="http://schemas.microsoft.com/office/drawing/2008/diagram" xmlns:p="http://schemas.openxmlformats.org/presentationml/2006/main">
+<p:notes xmlns:a="http://schemas.openxmlformats.org/drawingml/2006/main" xmlns:r="http://schemas.openxmlformats.org/officeDocument/2006/relationships" xmlns:p="http://schemas.openxmlformats.org/presentationml/2006/main">
   <p:cSld>
     <p:spTree>
       <p:nvGrpSpPr>
@@ -1080,7 +1048,7 @@
             <a:spLocks noGrp="1" noRot="1" noChangeAspect="1" noTextEdit="1"/>
           </p:cNvSpPr>
           <p:nvPr>
-            <p:ph type="sldImg" idx="0"/>
+            <p:ph type="sldImg"/>
           </p:nvPr>
         </p:nvSpPr>
         <p:spPr/>
@@ -1103,10 +1071,6 @@
             <a:pPr lvl="0">
               <a:defRPr/>
             </a:pPr>
-            <a:r>
-              <a:rPr lang="ko-KR" altLang="en-US"/>
-              <a:t/>
-            </a:r>
             <a:endParaRPr lang="ko-KR" altLang="en-US"/>
           </a:p>
         </p:txBody>
@@ -1149,7 +1113,7 @@
 </file>
 
 <file path=ppt/notesSlides/notesSlide8.xml><?xml version="1.0" encoding="utf-8"?>
-<p:notes xmlns:r="http://schemas.openxmlformats.org/officeDocument/2006/relationships" xmlns:c="http://schemas.openxmlformats.org/drawingml/2006/chart" xmlns:a="http://schemas.openxmlformats.org/drawingml/2006/main" xmlns:dgm="http://schemas.openxmlformats.org/drawingml/2006/diagram" xmlns:dsp="http://schemas.microsoft.com/office/drawing/2008/diagram" xmlns:p="http://schemas.openxmlformats.org/presentationml/2006/main">
+<p:notes xmlns:a="http://schemas.openxmlformats.org/drawingml/2006/main" xmlns:r="http://schemas.openxmlformats.org/officeDocument/2006/relationships" xmlns:p="http://schemas.openxmlformats.org/presentationml/2006/main">
   <p:cSld>
     <p:spTree>
       <p:nvGrpSpPr>
@@ -1172,7 +1136,7 @@
             <a:spLocks noGrp="1" noRot="1" noChangeAspect="1" noTextEdit="1"/>
           </p:cNvSpPr>
           <p:nvPr>
-            <p:ph type="sldImg" idx="0"/>
+            <p:ph type="sldImg"/>
           </p:nvPr>
         </p:nvSpPr>
         <p:spPr/>
@@ -1195,10 +1159,6 @@
             <a:pPr lvl="0">
               <a:defRPr/>
             </a:pPr>
-            <a:r>
-              <a:rPr lang="ko-KR" altLang="en-US"/>
-              <a:t/>
-            </a:r>
             <a:endParaRPr lang="ko-KR" altLang="en-US"/>
           </a:p>
         </p:txBody>
@@ -1241,7 +1201,7 @@
 </file>
 
 <file path=ppt/notesSlides/notesSlide9.xml><?xml version="1.0" encoding="utf-8"?>
-<p:notes xmlns:r="http://schemas.openxmlformats.org/officeDocument/2006/relationships" xmlns:c="http://schemas.openxmlformats.org/drawingml/2006/chart" xmlns:a="http://schemas.openxmlformats.org/drawingml/2006/main" xmlns:dgm="http://schemas.openxmlformats.org/drawingml/2006/diagram" xmlns:dsp="http://schemas.microsoft.com/office/drawing/2008/diagram" xmlns:p="http://schemas.openxmlformats.org/presentationml/2006/main">
+<p:notes xmlns:a="http://schemas.openxmlformats.org/drawingml/2006/main" xmlns:r="http://schemas.openxmlformats.org/officeDocument/2006/relationships" xmlns:p="http://schemas.openxmlformats.org/presentationml/2006/main">
   <p:cSld>
     <p:spTree>
       <p:nvGrpSpPr>
@@ -1264,7 +1224,7 @@
             <a:spLocks noGrp="1" noRot="1" noChangeAspect="1" noTextEdit="1"/>
           </p:cNvSpPr>
           <p:nvPr>
-            <p:ph type="sldImg" idx="0"/>
+            <p:ph type="sldImg"/>
           </p:nvPr>
         </p:nvSpPr>
         <p:spPr/>
@@ -1287,10 +1247,6 @@
             <a:pPr lvl="0">
               <a:defRPr/>
             </a:pPr>
-            <a:r>
-              <a:rPr lang="ko-KR" altLang="en-US"/>
-              <a:t/>
-            </a:r>
             <a:endParaRPr lang="ko-KR" altLang="en-US"/>
           </a:p>
         </p:txBody>
@@ -1365,6 +1321,11 @@
 <file path=ppt/slideMasters/slideMaster1.xml><?xml version="1.0" encoding="utf-8"?>
 <p:sldMaster xmlns:a="http://schemas.openxmlformats.org/drawingml/2006/main" xmlns:r="http://schemas.openxmlformats.org/officeDocument/2006/relationships" xmlns:p="http://schemas.openxmlformats.org/presentationml/2006/main">
   <p:cSld>
+    <p:bg>
+      <p:bgRef idx="1001">
+        <a:schemeClr val="bg1"/>
+      </p:bgRef>
+    </p:bg>
     <p:spTree>
       <p:nvGrpSpPr>
         <p:cNvPr id="1" name=""/>
@@ -1647,6 +1608,7 @@
         <a:solidFill>
           <a:srgbClr val="0F1117"/>
         </a:solidFill>
+        <a:effectLst/>
       </p:bgPr>
     </p:bg>
     <p:spTree>
@@ -1682,6 +1644,13 @@
           </a:solidFill>
           <a:ln/>
         </p:spPr>
+        <p:txBody>
+          <a:bodyPr/>
+          <a:lstStyle/>
+          <a:p>
+            <a:endParaRPr lang="ko-KR" altLang="en-US"/>
+          </a:p>
+        </p:txBody>
       </p:sp>
       <p:sp>
         <p:nvSpPr>
@@ -1702,6 +1671,13 @@
           </a:solidFill>
           <a:ln/>
         </p:spPr>
+        <p:txBody>
+          <a:bodyPr/>
+          <a:lstStyle/>
+          <a:p>
+            <a:endParaRPr lang="ko-KR" altLang="en-US"/>
+          </a:p>
+        </p:txBody>
       </p:sp>
       <p:sp>
         <p:nvSpPr>
@@ -1722,6 +1698,13 @@
           </a:solidFill>
           <a:ln/>
         </p:spPr>
+        <p:txBody>
+          <a:bodyPr/>
+          <a:lstStyle/>
+          <a:p>
+            <a:endParaRPr lang="ko-KR" altLang="en-US"/>
+          </a:p>
+        </p:txBody>
       </p:sp>
       <p:sp>
         <p:nvSpPr>
@@ -1742,6 +1725,13 @@
           </a:solidFill>
           <a:ln/>
         </p:spPr>
+        <p:txBody>
+          <a:bodyPr/>
+          <a:lstStyle/>
+          <a:p>
+            <a:endParaRPr lang="ko-KR" altLang="en-US"/>
+          </a:p>
+        </p:txBody>
       </p:sp>
       <p:sp>
         <p:nvSpPr>
@@ -1762,6 +1752,13 @@
           </a:solidFill>
           <a:ln/>
         </p:spPr>
+        <p:txBody>
+          <a:bodyPr/>
+          <a:lstStyle/>
+          <a:p>
+            <a:endParaRPr lang="ko-KR" altLang="en-US"/>
+          </a:p>
+        </p:txBody>
       </p:sp>
       <p:sp>
         <p:nvSpPr>
@@ -1782,6 +1779,13 @@
           </a:solidFill>
           <a:ln/>
         </p:spPr>
+        <p:txBody>
+          <a:bodyPr/>
+          <a:lstStyle/>
+          <a:p>
+            <a:endParaRPr lang="ko-KR" altLang="en-US"/>
+          </a:p>
+        </p:txBody>
       </p:sp>
       <p:sp>
         <p:nvSpPr>
@@ -1802,6 +1806,13 @@
           </a:solidFill>
           <a:ln/>
         </p:spPr>
+        <p:txBody>
+          <a:bodyPr/>
+          <a:lstStyle/>
+          <a:p>
+            <a:endParaRPr lang="ko-KR" altLang="en-US"/>
+          </a:p>
+        </p:txBody>
       </p:sp>
       <p:sp>
         <p:nvSpPr>
@@ -1822,6 +1833,13 @@
           </a:solidFill>
           <a:ln/>
         </p:spPr>
+        <p:txBody>
+          <a:bodyPr/>
+          <a:lstStyle/>
+          <a:p>
+            <a:endParaRPr lang="ko-KR" altLang="en-US"/>
+          </a:p>
+        </p:txBody>
       </p:sp>
       <p:sp>
         <p:nvSpPr>
@@ -1842,6 +1860,13 @@
           </a:solidFill>
           <a:ln/>
         </p:spPr>
+        <p:txBody>
+          <a:bodyPr/>
+          <a:lstStyle/>
+          <a:p>
+            <a:endParaRPr lang="ko-KR" altLang="en-US"/>
+          </a:p>
+        </p:txBody>
       </p:sp>
       <p:sp>
         <p:nvSpPr>
@@ -1862,6 +1887,13 @@
           </a:solidFill>
           <a:ln/>
         </p:spPr>
+        <p:txBody>
+          <a:bodyPr/>
+          <a:lstStyle/>
+          <a:p>
+            <a:endParaRPr lang="ko-KR" altLang="en-US"/>
+          </a:p>
+        </p:txBody>
       </p:sp>
       <p:sp>
         <p:nvSpPr>
@@ -1882,6 +1914,13 @@
           </a:solidFill>
           <a:ln/>
         </p:spPr>
+        <p:txBody>
+          <a:bodyPr/>
+          <a:lstStyle/>
+          <a:p>
+            <a:endParaRPr lang="ko-KR" altLang="en-US"/>
+          </a:p>
+        </p:txBody>
       </p:sp>
       <p:sp>
         <p:nvSpPr>
@@ -1902,6 +1941,13 @@
           </a:solidFill>
           <a:ln/>
         </p:spPr>
+        <p:txBody>
+          <a:bodyPr/>
+          <a:lstStyle/>
+          <a:p>
+            <a:endParaRPr lang="ko-KR" altLang="en-US"/>
+          </a:p>
+        </p:txBody>
       </p:sp>
       <p:sp>
         <p:nvSpPr>
@@ -1924,11 +1970,11 @@
           <a:bodyPr wrap="square" lIns="0" tIns="0" rIns="0" bIns="0" rtlCol="0" anchor="ctr"/>
           <a:lstStyle/>
           <a:p>
-            <a:pPr indent="0" marL="0">
-              <a:buNone/>
-            </a:pPr>
-            <a:r>
-              <a:rPr lang="en-US" sz="1400" b="1" spc="300" kern="0" dirty="0">
+            <a:pPr marL="0" indent="0">
+              <a:buNone/>
+            </a:pPr>
+            <a:r>
+              <a:rPr lang="en-US" sz="1400" b="1" kern="0" spc="300" dirty="0">
                 <a:solidFill>
                   <a:srgbClr val="4EC1FF"/>
                 </a:solidFill>
@@ -1963,11 +2009,11 @@
           <a:bodyPr wrap="square" lIns="0" tIns="0" rIns="0" bIns="0" rtlCol="0" anchor="ctr"/>
           <a:lstStyle/>
           <a:p>
-            <a:pPr indent="0" marL="0">
-              <a:buNone/>
-            </a:pPr>
-            <a:r>
-              <a:rPr lang="en-US" sz="9600" b="1" spc="800" kern="0" dirty="0">
+            <a:pPr marL="0" indent="0">
+              <a:buNone/>
+            </a:pPr>
+            <a:r>
+              <a:rPr lang="en-US" sz="9600" b="1" kern="0" spc="800" dirty="0">
                 <a:solidFill>
                   <a:srgbClr val="E8EBF2"/>
                 </a:solidFill>
@@ -2002,7 +2048,7 @@
           <a:bodyPr wrap="square" lIns="0" tIns="0" rIns="0" bIns="0" rtlCol="0" anchor="ctr"/>
           <a:lstStyle/>
           <a:p>
-            <a:pPr indent="0" marL="0">
+            <a:pPr marL="0" indent="0">
               <a:buNone/>
             </a:pPr>
             <a:r>
@@ -2039,6 +2085,13 @@
           </a:solidFill>
           <a:ln/>
         </p:spPr>
+        <p:txBody>
+          <a:bodyPr/>
+          <a:lstStyle/>
+          <a:p>
+            <a:endParaRPr lang="ko-KR" altLang="en-US"/>
+          </a:p>
+        </p:txBody>
       </p:sp>
       <p:sp>
         <p:nvSpPr>
@@ -2061,7 +2114,7 @@
           <a:bodyPr wrap="square" lIns="0" tIns="0" rIns="0" bIns="0" rtlCol="0" anchor="ctr"/>
           <a:lstStyle/>
           <a:p>
-            <a:pPr indent="0" marL="0">
+            <a:pPr marL="0" indent="0">
               <a:lnSpc>
                 <a:spcPct val="130000"/>
               </a:lnSpc>
@@ -2081,7 +2134,7 @@
             <a:endParaRPr lang="en-US" sz="1600" dirty="0"/>
           </a:p>
           <a:p>
-            <a:pPr indent="0" marL="0">
+            <a:pPr marL="0" indent="0">
               <a:lnSpc>
                 <a:spcPct val="130000"/>
               </a:lnSpc>
@@ -2101,7 +2154,7 @@
             <a:endParaRPr lang="en-US" sz="1600" dirty="0"/>
           </a:p>
           <a:p>
-            <a:pPr indent="0" marL="0">
+            <a:pPr marL="0" indent="0">
               <a:lnSpc>
                 <a:spcPct val="130000"/>
               </a:lnSpc>
@@ -2143,24 +2196,31 @@
           </a:solidFill>
           <a:ln/>
           <a:effectLst>
-            <a:outerShdw sx="100000" sy="100000" kx="0" ky="0" algn="bl" rotWithShape="0" blurRad="114300" dist="38100" dir="8100000">
+            <a:outerShdw blurRad="114300" dist="38100" dir="8100000" algn="bl" rotWithShape="0">
               <a:srgbClr val="000000">
                 <a:alpha val="35000"/>
               </a:srgbClr>
             </a:outerShdw>
           </a:effectLst>
         </p:spPr>
+        <p:txBody>
+          <a:bodyPr/>
+          <a:lstStyle/>
+          <a:p>
+            <a:endParaRPr lang="ko-KR" altLang="en-US"/>
+          </a:p>
+        </p:txBody>
       </p:sp>
       <p:pic>
         <p:nvPicPr>
-          <p:cNvPr id="20" name="Image 0" descr="shot.png">    </p:cNvPr>
+          <p:cNvPr id="20" name="Image 0" descr="shot.png"/>
           <p:cNvPicPr>
             <a:picLocks noChangeAspect="1"/>
           </p:cNvPicPr>
           <p:nvPr/>
         </p:nvPicPr>
         <p:blipFill>
-          <a:blip r:embed="rId1"/>
+          <a:blip r:embed="rId3"/>
           <a:stretch>
             <a:fillRect/>
           </a:stretch>
@@ -2191,6 +2251,7 @@
         <a:solidFill>
           <a:srgbClr val="0F1117"/>
         </a:solidFill>
+        <a:effectLst/>
       </p:bgPr>
     </p:bg>
     <p:spTree>
@@ -2226,6 +2287,13 @@
           </a:solidFill>
           <a:ln/>
         </p:spPr>
+        <p:txBody>
+          <a:bodyPr/>
+          <a:lstStyle/>
+          <a:p>
+            <a:endParaRPr lang="ko-KR" altLang="en-US"/>
+          </a:p>
+        </p:txBody>
       </p:sp>
       <p:sp>
         <p:nvSpPr>
@@ -2248,7 +2316,7 @@
           <a:bodyPr wrap="square" lIns="0" tIns="0" rIns="0" bIns="0" rtlCol="0" anchor="ctr"/>
           <a:lstStyle/>
           <a:p>
-            <a:pPr algn="l" indent="0" marL="0">
+            <a:pPr marL="0" indent="0" algn="l">
               <a:buNone/>
             </a:pPr>
             <a:r>
@@ -2287,7 +2355,7 @@
           <a:bodyPr wrap="square" lIns="0" tIns="0" rIns="0" bIns="0" rtlCol="0" anchor="ctr"/>
           <a:lstStyle/>
           <a:p>
-            <a:pPr algn="l" indent="0" marL="0">
+            <a:pPr marL="0" indent="0" algn="l">
               <a:buNone/>
             </a:pPr>
             <a:r>
@@ -2324,6 +2392,13 @@
           </a:solidFill>
           <a:ln/>
         </p:spPr>
+        <p:txBody>
+          <a:bodyPr/>
+          <a:lstStyle/>
+          <a:p>
+            <a:endParaRPr lang="ko-KR" altLang="en-US"/>
+          </a:p>
+        </p:txBody>
       </p:sp>
       <p:sp>
         <p:nvSpPr>
@@ -2344,6 +2419,13 @@
           </a:solidFill>
           <a:ln/>
         </p:spPr>
+        <p:txBody>
+          <a:bodyPr/>
+          <a:lstStyle/>
+          <a:p>
+            <a:endParaRPr lang="ko-KR" altLang="en-US"/>
+          </a:p>
+        </p:txBody>
       </p:sp>
       <p:sp>
         <p:nvSpPr>
@@ -2364,6 +2446,13 @@
           </a:solidFill>
           <a:ln/>
         </p:spPr>
+        <p:txBody>
+          <a:bodyPr/>
+          <a:lstStyle/>
+          <a:p>
+            <a:endParaRPr lang="ko-KR" altLang="en-US"/>
+          </a:p>
+        </p:txBody>
       </p:sp>
       <p:sp>
         <p:nvSpPr>
@@ -2384,6 +2473,13 @@
           </a:solidFill>
           <a:ln/>
         </p:spPr>
+        <p:txBody>
+          <a:bodyPr/>
+          <a:lstStyle/>
+          <a:p>
+            <a:endParaRPr lang="ko-KR" altLang="en-US"/>
+          </a:p>
+        </p:txBody>
       </p:sp>
       <p:sp>
         <p:nvSpPr>
@@ -2406,13 +2502,20 @@
           </a:solidFill>
           <a:ln/>
           <a:effectLst>
-            <a:outerShdw sx="100000" sy="100000" kx="0" ky="0" algn="bl" rotWithShape="0" blurRad="114300" dist="38100" dir="8100000">
+            <a:outerShdw blurRad="114300" dist="38100" dir="8100000" algn="bl" rotWithShape="0">
               <a:srgbClr val="000000">
                 <a:alpha val="35000"/>
               </a:srgbClr>
             </a:outerShdw>
           </a:effectLst>
         </p:spPr>
+        <p:txBody>
+          <a:bodyPr/>
+          <a:lstStyle/>
+          <a:p>
+            <a:endParaRPr lang="ko-KR" altLang="en-US"/>
+          </a:p>
+        </p:txBody>
       </p:sp>
       <p:sp>
         <p:nvSpPr>
@@ -2433,6 +2536,13 @@
           </a:solidFill>
           <a:ln/>
         </p:spPr>
+        <p:txBody>
+          <a:bodyPr/>
+          <a:lstStyle/>
+          <a:p>
+            <a:endParaRPr lang="ko-KR" altLang="en-US"/>
+          </a:p>
+        </p:txBody>
       </p:sp>
       <p:sp>
         <p:nvSpPr>
@@ -2453,6 +2563,13 @@
           </a:solidFill>
           <a:ln/>
         </p:spPr>
+        <p:txBody>
+          <a:bodyPr/>
+          <a:lstStyle/>
+          <a:p>
+            <a:endParaRPr lang="ko-KR" altLang="en-US"/>
+          </a:p>
+        </p:txBody>
       </p:sp>
       <p:sp>
         <p:nvSpPr>
@@ -2473,6 +2590,13 @@
           </a:solidFill>
           <a:ln/>
         </p:spPr>
+        <p:txBody>
+          <a:bodyPr/>
+          <a:lstStyle/>
+          <a:p>
+            <a:endParaRPr lang="ko-KR" altLang="en-US"/>
+          </a:p>
+        </p:txBody>
       </p:sp>
       <p:sp>
         <p:nvSpPr>
@@ -2493,6 +2617,13 @@
           </a:solidFill>
           <a:ln/>
         </p:spPr>
+        <p:txBody>
+          <a:bodyPr/>
+          <a:lstStyle/>
+          <a:p>
+            <a:endParaRPr lang="ko-KR" altLang="en-US"/>
+          </a:p>
+        </p:txBody>
       </p:sp>
       <p:sp>
         <p:nvSpPr>
@@ -2515,7 +2646,7 @@
           <a:bodyPr wrap="square" lIns="0" tIns="0" rIns="0" bIns="0" rtlCol="0" anchor="ctr"/>
           <a:lstStyle/>
           <a:p>
-            <a:pPr indent="0" marL="0">
+            <a:pPr marL="0" indent="0">
               <a:buNone/>
             </a:pPr>
             <a:r>
@@ -2554,7 +2685,7 @@
           <a:bodyPr wrap="square" lIns="0" tIns="0" rIns="0" bIns="0" rtlCol="0" anchor="ctr"/>
           <a:lstStyle/>
           <a:p>
-            <a:pPr indent="0" marL="0">
+            <a:pPr marL="0" indent="0">
               <a:lnSpc>
                 <a:spcPct val="125000"/>
               </a:lnSpc>
@@ -2574,7 +2705,7 @@
             <a:endParaRPr lang="en-US" sz="1500" dirty="0"/>
           </a:p>
           <a:p>
-            <a:pPr indent="0" marL="0">
+            <a:pPr marL="0" indent="0">
               <a:lnSpc>
                 <a:spcPct val="125000"/>
               </a:lnSpc>
@@ -2616,13 +2747,20 @@
           </a:solidFill>
           <a:ln/>
           <a:effectLst>
-            <a:outerShdw sx="100000" sy="100000" kx="0" ky="0" algn="bl" rotWithShape="0" blurRad="114300" dist="38100" dir="8100000">
+            <a:outerShdw blurRad="114300" dist="38100" dir="8100000" algn="bl" rotWithShape="0">
               <a:srgbClr val="000000">
                 <a:alpha val="35000"/>
               </a:srgbClr>
             </a:outerShdw>
           </a:effectLst>
         </p:spPr>
+        <p:txBody>
+          <a:bodyPr/>
+          <a:lstStyle/>
+          <a:p>
+            <a:endParaRPr lang="ko-KR" altLang="en-US"/>
+          </a:p>
+        </p:txBody>
       </p:sp>
       <p:sp>
         <p:nvSpPr>
@@ -2643,6 +2781,13 @@
           </a:solidFill>
           <a:ln/>
         </p:spPr>
+        <p:txBody>
+          <a:bodyPr/>
+          <a:lstStyle/>
+          <a:p>
+            <a:endParaRPr lang="ko-KR" altLang="en-US"/>
+          </a:p>
+        </p:txBody>
       </p:sp>
       <p:sp>
         <p:nvSpPr>
@@ -2663,6 +2808,13 @@
           </a:solidFill>
           <a:ln/>
         </p:spPr>
+        <p:txBody>
+          <a:bodyPr/>
+          <a:lstStyle/>
+          <a:p>
+            <a:endParaRPr lang="ko-KR" altLang="en-US"/>
+          </a:p>
+        </p:txBody>
       </p:sp>
       <p:sp>
         <p:nvSpPr>
@@ -2683,6 +2835,13 @@
           </a:solidFill>
           <a:ln/>
         </p:spPr>
+        <p:txBody>
+          <a:bodyPr/>
+          <a:lstStyle/>
+          <a:p>
+            <a:endParaRPr lang="ko-KR" altLang="en-US"/>
+          </a:p>
+        </p:txBody>
       </p:sp>
       <p:sp>
         <p:nvSpPr>
@@ -2703,6 +2862,13 @@
           </a:solidFill>
           <a:ln/>
         </p:spPr>
+        <p:txBody>
+          <a:bodyPr/>
+          <a:lstStyle/>
+          <a:p>
+            <a:endParaRPr lang="ko-KR" altLang="en-US"/>
+          </a:p>
+        </p:txBody>
       </p:sp>
       <p:sp>
         <p:nvSpPr>
@@ -2725,7 +2891,7 @@
           <a:bodyPr wrap="square" lIns="0" tIns="0" rIns="0" bIns="0" rtlCol="0" anchor="ctr"/>
           <a:lstStyle/>
           <a:p>
-            <a:pPr indent="0" marL="0">
+            <a:pPr marL="0" indent="0">
               <a:buNone/>
             </a:pPr>
             <a:r>
@@ -2764,42 +2930,51 @@
           <a:bodyPr wrap="square" lIns="0" tIns="0" rIns="0" bIns="0" rtlCol="0" anchor="ctr"/>
           <a:lstStyle/>
           <a:p>
-            <a:pPr indent="0" marL="0">
+            <a:pPr marL="0" indent="0">
               <a:lnSpc>
                 <a:spcPct val="125000"/>
               </a:lnSpc>
               <a:buNone/>
             </a:pPr>
             <a:r>
-              <a:rPr lang="en-US" sz="1500" dirty="0">
+              <a:rPr lang="ko-KR" altLang="en-US" sz="1500" dirty="0">
                 <a:solidFill>
                   <a:srgbClr val="E8EBF2"/>
                 </a:solidFill>
                 <a:latin typeface="Malgun Gothic" pitchFamily="34" charset="0"/>
                 <a:ea typeface="Malgun Gothic" pitchFamily="34" charset="-122"/>
-                <a:cs typeface="Malgun Gothic" pitchFamily="34" charset="-120"/>
-              </a:rPr>
-              <a:t>외부 라이브러리 없이 순수</a:t>
-            </a:r>
-            <a:endParaRPr lang="en-US" sz="1500" dirty="0"/>
-          </a:p>
-          <a:p>
-            <a:pPr indent="0" marL="0">
-              <a:lnSpc>
-                <a:spcPct val="125000"/>
-              </a:lnSpc>
-              <a:buNone/>
-            </a:pPr>
-            <a:r>
-              <a:rPr lang="en-US" sz="1500" dirty="0">
+              </a:rPr>
+              <a:t>유니티</a:t>
+            </a:r>
+            <a:r>
+              <a:rPr lang="en-US" altLang="ko-KR" sz="1500" dirty="0">
                 <a:solidFill>
                   <a:srgbClr val="E8EBF2"/>
                 </a:solidFill>
                 <a:latin typeface="Malgun Gothic" pitchFamily="34" charset="0"/>
                 <a:ea typeface="Malgun Gothic" pitchFamily="34" charset="-122"/>
-                <a:cs typeface="Malgun Gothic" pitchFamily="34" charset="-120"/>
-              </a:rPr>
-              <a:t>JS로 게임 로직 구현 능력 향상</a:t>
+              </a:rPr>
+              <a:t>, </a:t>
+            </a:r>
+            <a:r>
+              <a:rPr lang="ko-KR" altLang="en-US" sz="1500" dirty="0" err="1">
+                <a:solidFill>
+                  <a:srgbClr val="E8EBF2"/>
+                </a:solidFill>
+                <a:latin typeface="Malgun Gothic" pitchFamily="34" charset="0"/>
+                <a:ea typeface="Malgun Gothic" pitchFamily="34" charset="-122"/>
+              </a:rPr>
+              <a:t>언리얼엔진</a:t>
+            </a:r>
+            <a:r>
+              <a:rPr lang="ko-KR" altLang="en-US" sz="1500" dirty="0">
+                <a:solidFill>
+                  <a:srgbClr val="E8EBF2"/>
+                </a:solidFill>
+                <a:latin typeface="Malgun Gothic" pitchFamily="34" charset="0"/>
+                <a:ea typeface="Malgun Gothic" pitchFamily="34" charset="-122"/>
+              </a:rPr>
+              <a:t> 등의 개발 툴에서 기본적으로 지원하는 개념들을 기초적인 코드로 직접 구현</a:t>
             </a:r>
             <a:endParaRPr lang="en-US" sz="1500" dirty="0"/>
           </a:p>
@@ -2826,13 +3001,20 @@
           </a:solidFill>
           <a:ln/>
           <a:effectLst>
-            <a:outerShdw sx="100000" sy="100000" kx="0" ky="0" algn="bl" rotWithShape="0" blurRad="114300" dist="38100" dir="8100000">
+            <a:outerShdw blurRad="114300" dist="38100" dir="8100000" algn="bl" rotWithShape="0">
               <a:srgbClr val="000000">
                 <a:alpha val="35000"/>
               </a:srgbClr>
             </a:outerShdw>
           </a:effectLst>
         </p:spPr>
+        <p:txBody>
+          <a:bodyPr/>
+          <a:lstStyle/>
+          <a:p>
+            <a:endParaRPr lang="ko-KR" altLang="en-US"/>
+          </a:p>
+        </p:txBody>
       </p:sp>
       <p:sp>
         <p:nvSpPr>
@@ -2853,6 +3035,13 @@
           </a:solidFill>
           <a:ln/>
         </p:spPr>
+        <p:txBody>
+          <a:bodyPr/>
+          <a:lstStyle/>
+          <a:p>
+            <a:endParaRPr lang="ko-KR" altLang="en-US"/>
+          </a:p>
+        </p:txBody>
       </p:sp>
       <p:sp>
         <p:nvSpPr>
@@ -2873,6 +3062,13 @@
           </a:solidFill>
           <a:ln/>
         </p:spPr>
+        <p:txBody>
+          <a:bodyPr/>
+          <a:lstStyle/>
+          <a:p>
+            <a:endParaRPr lang="ko-KR" altLang="en-US"/>
+          </a:p>
+        </p:txBody>
       </p:sp>
       <p:sp>
         <p:nvSpPr>
@@ -2893,6 +3089,13 @@
           </a:solidFill>
           <a:ln/>
         </p:spPr>
+        <p:txBody>
+          <a:bodyPr/>
+          <a:lstStyle/>
+          <a:p>
+            <a:endParaRPr lang="ko-KR" altLang="en-US"/>
+          </a:p>
+        </p:txBody>
       </p:sp>
       <p:sp>
         <p:nvSpPr>
@@ -2913,6 +3116,13 @@
           </a:solidFill>
           <a:ln/>
         </p:spPr>
+        <p:txBody>
+          <a:bodyPr/>
+          <a:lstStyle/>
+          <a:p>
+            <a:endParaRPr lang="ko-KR" altLang="en-US"/>
+          </a:p>
+        </p:txBody>
       </p:sp>
       <p:sp>
         <p:nvSpPr>
@@ -2935,7 +3145,7 @@
           <a:bodyPr wrap="square" lIns="0" tIns="0" rIns="0" bIns="0" rtlCol="0" anchor="ctr"/>
           <a:lstStyle/>
           <a:p>
-            <a:pPr indent="0" marL="0">
+            <a:pPr marL="0" indent="0">
               <a:buNone/>
             </a:pPr>
             <a:r>
@@ -2974,7 +3184,7 @@
           <a:bodyPr wrap="square" lIns="0" tIns="0" rIns="0" bIns="0" rtlCol="0" anchor="ctr"/>
           <a:lstStyle/>
           <a:p>
-            <a:pPr indent="0" marL="0">
+            <a:pPr marL="0" indent="0">
               <a:lnSpc>
                 <a:spcPct val="125000"/>
               </a:lnSpc>
@@ -2994,7 +3204,7 @@
             <a:endParaRPr lang="en-US" sz="1500" dirty="0"/>
           </a:p>
           <a:p>
-            <a:pPr indent="0" marL="0">
+            <a:pPr marL="0" indent="0">
               <a:lnSpc>
                 <a:spcPct val="125000"/>
               </a:lnSpc>
@@ -3036,13 +3246,20 @@
           </a:solidFill>
           <a:ln/>
           <a:effectLst>
-            <a:outerShdw sx="100000" sy="100000" kx="0" ky="0" algn="bl" rotWithShape="0" blurRad="114300" dist="38100" dir="8100000">
+            <a:outerShdw blurRad="114300" dist="38100" dir="8100000" algn="bl" rotWithShape="0">
               <a:srgbClr val="000000">
                 <a:alpha val="35000"/>
               </a:srgbClr>
             </a:outerShdw>
           </a:effectLst>
         </p:spPr>
+        <p:txBody>
+          <a:bodyPr/>
+          <a:lstStyle/>
+          <a:p>
+            <a:endParaRPr lang="ko-KR" altLang="en-US"/>
+          </a:p>
+        </p:txBody>
       </p:sp>
       <p:sp>
         <p:nvSpPr>
@@ -3065,7 +3282,7 @@
           <a:bodyPr wrap="square" lIns="0" tIns="0" rIns="0" bIns="0" rtlCol="0" anchor="ctr"/>
           <a:lstStyle/>
           <a:p>
-            <a:pPr algn="ctr" indent="0" marL="0">
+            <a:pPr marL="0" indent="0" algn="ctr">
               <a:buNone/>
             </a:pPr>
             <a:r>
@@ -3079,9 +3296,6 @@
               </a:rPr>
               <a:t>“ </a:t>
             </a:r>
-            <a:pPr algn="ctr" indent="0" marL="0">
-              <a:buNone/>
-            </a:pPr>
             <a:r>
               <a:rPr lang="en-US" sz="1700" dirty="0">
                 <a:solidFill>
@@ -3093,9 +3307,6 @@
               </a:rPr>
               <a:t>HTML·CSS는 심플하게 잡고, JavaScript 로직 구현에 집중하는 것을 목표로 했습니다.</a:t>
             </a:r>
-            <a:pPr algn="ctr" indent="0" marL="0">
-              <a:buNone/>
-            </a:pPr>
             <a:r>
               <a:rPr lang="en-US" sz="2800" b="1" dirty="0">
                 <a:solidFill>
@@ -3127,6 +3338,7 @@
         <a:solidFill>
           <a:srgbClr val="0F1117"/>
         </a:solidFill>
+        <a:effectLst/>
       </p:bgPr>
     </p:bg>
     <p:spTree>
@@ -3162,6 +3374,13 @@
           </a:solidFill>
           <a:ln/>
         </p:spPr>
+        <p:txBody>
+          <a:bodyPr/>
+          <a:lstStyle/>
+          <a:p>
+            <a:endParaRPr lang="ko-KR" altLang="en-US"/>
+          </a:p>
+        </p:txBody>
       </p:sp>
       <p:sp>
         <p:nvSpPr>
@@ -3184,7 +3403,7 @@
           <a:bodyPr wrap="square" lIns="0" tIns="0" rIns="0" bIns="0" rtlCol="0" anchor="ctr"/>
           <a:lstStyle/>
           <a:p>
-            <a:pPr algn="l" indent="0" marL="0">
+            <a:pPr marL="0" indent="0" algn="l">
               <a:buNone/>
             </a:pPr>
             <a:r>
@@ -3223,7 +3442,7 @@
           <a:bodyPr wrap="square" lIns="0" tIns="0" rIns="0" bIns="0" rtlCol="0" anchor="ctr"/>
           <a:lstStyle/>
           <a:p>
-            <a:pPr algn="l" indent="0" marL="0">
+            <a:pPr marL="0" indent="0" algn="l">
               <a:buNone/>
             </a:pPr>
             <a:r>
@@ -3260,6 +3479,13 @@
           </a:solidFill>
           <a:ln/>
         </p:spPr>
+        <p:txBody>
+          <a:bodyPr/>
+          <a:lstStyle/>
+          <a:p>
+            <a:endParaRPr lang="ko-KR" altLang="en-US"/>
+          </a:p>
+        </p:txBody>
       </p:sp>
       <p:sp>
         <p:nvSpPr>
@@ -3280,6 +3506,13 @@
           </a:solidFill>
           <a:ln/>
         </p:spPr>
+        <p:txBody>
+          <a:bodyPr/>
+          <a:lstStyle/>
+          <a:p>
+            <a:endParaRPr lang="ko-KR" altLang="en-US"/>
+          </a:p>
+        </p:txBody>
       </p:sp>
       <p:sp>
         <p:nvSpPr>
@@ -3300,6 +3533,13 @@
           </a:solidFill>
           <a:ln/>
         </p:spPr>
+        <p:txBody>
+          <a:bodyPr/>
+          <a:lstStyle/>
+          <a:p>
+            <a:endParaRPr lang="ko-KR" altLang="en-US"/>
+          </a:p>
+        </p:txBody>
       </p:sp>
       <p:sp>
         <p:nvSpPr>
@@ -3320,6 +3560,13 @@
           </a:solidFill>
           <a:ln/>
         </p:spPr>
+        <p:txBody>
+          <a:bodyPr/>
+          <a:lstStyle/>
+          <a:p>
+            <a:endParaRPr lang="ko-KR" altLang="en-US"/>
+          </a:p>
+        </p:txBody>
       </p:sp>
       <p:sp>
         <p:nvSpPr>
@@ -3342,13 +3589,20 @@
           </a:solidFill>
           <a:ln/>
           <a:effectLst>
-            <a:outerShdw sx="100000" sy="100000" kx="0" ky="0" algn="bl" rotWithShape="0" blurRad="114300" dist="38100" dir="8100000">
+            <a:outerShdw blurRad="114300" dist="38100" dir="8100000" algn="bl" rotWithShape="0">
               <a:srgbClr val="000000">
                 <a:alpha val="35000"/>
               </a:srgbClr>
             </a:outerShdw>
           </a:effectLst>
         </p:spPr>
+        <p:txBody>
+          <a:bodyPr/>
+          <a:lstStyle/>
+          <a:p>
+            <a:endParaRPr lang="ko-KR" altLang="en-US"/>
+          </a:p>
+        </p:txBody>
       </p:sp>
       <p:sp>
         <p:nvSpPr>
@@ -3369,6 +3623,13 @@
           </a:solidFill>
           <a:ln/>
         </p:spPr>
+        <p:txBody>
+          <a:bodyPr/>
+          <a:lstStyle/>
+          <a:p>
+            <a:endParaRPr lang="ko-KR" altLang="en-US"/>
+          </a:p>
+        </p:txBody>
       </p:sp>
       <p:sp>
         <p:nvSpPr>
@@ -3391,7 +3652,7 @@
           <a:bodyPr wrap="square" lIns="0" tIns="0" rIns="0" bIns="0" rtlCol="0" anchor="ctr"/>
           <a:lstStyle/>
           <a:p>
-            <a:pPr indent="0" marL="0">
+            <a:pPr marL="0" indent="0">
               <a:buNone/>
             </a:pPr>
             <a:r>
@@ -3430,7 +3691,7 @@
           <a:bodyPr wrap="square" lIns="0" tIns="0" rIns="0" bIns="0" rtlCol="0" anchor="ctr"/>
           <a:lstStyle/>
           <a:p>
-            <a:pPr indent="0" marL="0">
+            <a:pPr marL="0" indent="0">
               <a:lnSpc>
                 <a:spcPct val="120000"/>
               </a:lnSpc>
@@ -3450,7 +3711,7 @@
             <a:endParaRPr lang="en-US" sz="1500" dirty="0"/>
           </a:p>
           <a:p>
-            <a:pPr indent="0" marL="0">
+            <a:pPr marL="0" indent="0">
               <a:lnSpc>
                 <a:spcPct val="120000"/>
               </a:lnSpc>
@@ -3492,13 +3753,20 @@
           </a:solidFill>
           <a:ln/>
           <a:effectLst>
-            <a:outerShdw sx="100000" sy="100000" kx="0" ky="0" algn="bl" rotWithShape="0" blurRad="114300" dist="38100" dir="8100000">
+            <a:outerShdw blurRad="114300" dist="38100" dir="8100000" algn="bl" rotWithShape="0">
               <a:srgbClr val="000000">
                 <a:alpha val="35000"/>
               </a:srgbClr>
             </a:outerShdw>
           </a:effectLst>
         </p:spPr>
+        <p:txBody>
+          <a:bodyPr/>
+          <a:lstStyle/>
+          <a:p>
+            <a:endParaRPr lang="ko-KR" altLang="en-US"/>
+          </a:p>
+        </p:txBody>
       </p:sp>
       <p:sp>
         <p:nvSpPr>
@@ -3519,6 +3787,13 @@
           </a:solidFill>
           <a:ln/>
         </p:spPr>
+        <p:txBody>
+          <a:bodyPr/>
+          <a:lstStyle/>
+          <a:p>
+            <a:endParaRPr lang="ko-KR" altLang="en-US"/>
+          </a:p>
+        </p:txBody>
       </p:sp>
       <p:sp>
         <p:nvSpPr>
@@ -3541,7 +3816,7 @@
           <a:bodyPr wrap="square" lIns="0" tIns="0" rIns="0" bIns="0" rtlCol="0" anchor="ctr"/>
           <a:lstStyle/>
           <a:p>
-            <a:pPr indent="0" marL="0">
+            <a:pPr marL="0" indent="0">
               <a:buNone/>
             </a:pPr>
             <a:r>
@@ -3580,14 +3855,14 @@
           <a:bodyPr wrap="square" lIns="0" tIns="0" rIns="0" bIns="0" rtlCol="0" anchor="ctr"/>
           <a:lstStyle/>
           <a:p>
-            <a:pPr indent="0" marL="0">
+            <a:pPr marL="0" indent="0">
               <a:lnSpc>
                 <a:spcPct val="120000"/>
               </a:lnSpc>
               <a:buNone/>
             </a:pPr>
             <a:r>
-              <a:rPr lang="en-US" sz="1500" dirty="0">
+              <a:rPr lang="ko-KR" altLang="en-US" sz="1500" dirty="0">
                 <a:solidFill>
                   <a:srgbClr val="9099AC"/>
                 </a:solidFill>
@@ -3595,12 +3870,23 @@
                 <a:ea typeface="Malgun Gothic" pitchFamily="34" charset="-122"/>
                 <a:cs typeface="Malgun Gothic" pitchFamily="34" charset="-120"/>
               </a:rPr>
-              <a:t>Flexbox 레이아웃,</a:t>
+              <a:t>반응형</a:t>
+            </a:r>
+            <a:r>
+              <a:rPr lang="en-US" sz="1500" dirty="0">
+                <a:solidFill>
+                  <a:srgbClr val="9099AC"/>
+                </a:solidFill>
+                <a:latin typeface="Malgun Gothic" pitchFamily="34" charset="0"/>
+                <a:ea typeface="Malgun Gothic" pitchFamily="34" charset="-122"/>
+                <a:cs typeface="Malgun Gothic" pitchFamily="34" charset="-120"/>
+              </a:rPr>
+              <a:t> layout(Flex box),</a:t>
             </a:r>
             <a:endParaRPr lang="en-US" sz="1500" dirty="0"/>
           </a:p>
           <a:p>
-            <a:pPr indent="0" marL="0">
+            <a:pPr marL="0" indent="0">
               <a:lnSpc>
                 <a:spcPct val="120000"/>
               </a:lnSpc>
@@ -3642,13 +3928,20 @@
           </a:solidFill>
           <a:ln/>
           <a:effectLst>
-            <a:outerShdw sx="100000" sy="100000" kx="0" ky="0" algn="bl" rotWithShape="0" blurRad="114300" dist="38100" dir="8100000">
+            <a:outerShdw blurRad="114300" dist="38100" dir="8100000" algn="bl" rotWithShape="0">
               <a:srgbClr val="000000">
                 <a:alpha val="35000"/>
               </a:srgbClr>
             </a:outerShdw>
           </a:effectLst>
         </p:spPr>
+        <p:txBody>
+          <a:bodyPr/>
+          <a:lstStyle/>
+          <a:p>
+            <a:endParaRPr lang="ko-KR" altLang="en-US"/>
+          </a:p>
+        </p:txBody>
       </p:sp>
       <p:sp>
         <p:nvSpPr>
@@ -3669,6 +3962,13 @@
           </a:solidFill>
           <a:ln/>
         </p:spPr>
+        <p:txBody>
+          <a:bodyPr/>
+          <a:lstStyle/>
+          <a:p>
+            <a:endParaRPr lang="ko-KR" altLang="en-US"/>
+          </a:p>
+        </p:txBody>
       </p:sp>
       <p:sp>
         <p:nvSpPr>
@@ -3691,7 +3991,7 @@
           <a:bodyPr wrap="square" lIns="0" tIns="0" rIns="0" bIns="0" rtlCol="0" anchor="ctr"/>
           <a:lstStyle/>
           <a:p>
-            <a:pPr indent="0" marL="0">
+            <a:pPr marL="0" indent="0">
               <a:buNone/>
             </a:pPr>
             <a:r>
@@ -3730,7 +4030,7 @@
           <a:bodyPr wrap="square" lIns="0" tIns="0" rIns="0" bIns="0" rtlCol="0" anchor="ctr"/>
           <a:lstStyle/>
           <a:p>
-            <a:pPr indent="0" marL="0">
+            <a:pPr marL="0" indent="0">
               <a:lnSpc>
                 <a:spcPct val="120000"/>
               </a:lnSpc>
@@ -3750,7 +4050,7 @@
             <a:endParaRPr lang="en-US" sz="1500" dirty="0"/>
           </a:p>
           <a:p>
-            <a:pPr indent="0" marL="0">
+            <a:pPr marL="0" indent="0">
               <a:lnSpc>
                 <a:spcPct val="120000"/>
               </a:lnSpc>
@@ -3792,7 +4092,7 @@
           <a:bodyPr wrap="square" lIns="0" tIns="0" rIns="0" bIns="0" rtlCol="0" anchor="ctr"/>
           <a:lstStyle/>
           <a:p>
-            <a:pPr indent="0" marL="0">
+            <a:pPr marL="0" indent="0">
               <a:buNone/>
             </a:pPr>
             <a:r>
@@ -3831,13 +4131,20 @@
           </a:solidFill>
           <a:ln/>
           <a:effectLst>
-            <a:outerShdw sx="100000" sy="100000" kx="0" ky="0" algn="bl" rotWithShape="0" blurRad="114300" dist="38100" dir="8100000">
+            <a:outerShdw blurRad="114300" dist="38100" dir="8100000" algn="bl" rotWithShape="0">
               <a:srgbClr val="000000">
                 <a:alpha val="35000"/>
               </a:srgbClr>
             </a:outerShdw>
           </a:effectLst>
         </p:spPr>
+        <p:txBody>
+          <a:bodyPr/>
+          <a:lstStyle/>
+          <a:p>
+            <a:endParaRPr lang="ko-KR" altLang="en-US"/>
+          </a:p>
+        </p:txBody>
       </p:sp>
       <p:sp>
         <p:nvSpPr>
@@ -3860,7 +4167,7 @@
           <a:bodyPr wrap="square" lIns="0" tIns="0" rIns="0" bIns="0" rtlCol="0" anchor="ctr"/>
           <a:lstStyle/>
           <a:p>
-            <a:pPr indent="0" marL="0">
+            <a:pPr marL="0" indent="0">
               <a:buNone/>
             </a:pPr>
             <a:r>
@@ -3899,13 +4206,20 @@
           </a:solidFill>
           <a:ln/>
           <a:effectLst>
-            <a:outerShdw sx="100000" sy="100000" kx="0" ky="0" algn="bl" rotWithShape="0" blurRad="114300" dist="38100" dir="8100000">
+            <a:outerShdw blurRad="114300" dist="38100" dir="8100000" algn="bl" rotWithShape="0">
               <a:srgbClr val="000000">
                 <a:alpha val="35000"/>
               </a:srgbClr>
             </a:outerShdw>
           </a:effectLst>
         </p:spPr>
+        <p:txBody>
+          <a:bodyPr/>
+          <a:lstStyle/>
+          <a:p>
+            <a:endParaRPr lang="ko-KR" altLang="en-US"/>
+          </a:p>
+        </p:txBody>
       </p:sp>
       <p:sp>
         <p:nvSpPr>
@@ -3928,7 +4242,7 @@
           <a:bodyPr wrap="square" lIns="0" tIns="0" rIns="0" bIns="0" rtlCol="0" anchor="ctr"/>
           <a:lstStyle/>
           <a:p>
-            <a:pPr indent="0" marL="0">
+            <a:pPr marL="0" indent="0">
               <a:buNone/>
             </a:pPr>
             <a:r>
@@ -3967,13 +4281,20 @@
           </a:solidFill>
           <a:ln/>
           <a:effectLst>
-            <a:outerShdw sx="100000" sy="100000" kx="0" ky="0" algn="bl" rotWithShape="0" blurRad="114300" dist="38100" dir="8100000">
+            <a:outerShdw blurRad="114300" dist="38100" dir="8100000" algn="bl" rotWithShape="0">
               <a:srgbClr val="000000">
                 <a:alpha val="35000"/>
               </a:srgbClr>
             </a:outerShdw>
           </a:effectLst>
         </p:spPr>
+        <p:txBody>
+          <a:bodyPr/>
+          <a:lstStyle/>
+          <a:p>
+            <a:endParaRPr lang="ko-KR" altLang="en-US"/>
+          </a:p>
+        </p:txBody>
       </p:sp>
       <p:sp>
         <p:nvSpPr>
@@ -3996,7 +4317,7 @@
           <a:bodyPr wrap="square" lIns="0" tIns="0" rIns="0" bIns="0" rtlCol="0" anchor="ctr"/>
           <a:lstStyle/>
           <a:p>
-            <a:pPr indent="0" marL="0">
+            <a:pPr marL="0" indent="0">
               <a:buNone/>
             </a:pPr>
             <a:r>
@@ -4035,13 +4356,20 @@
           </a:solidFill>
           <a:ln/>
           <a:effectLst>
-            <a:outerShdw sx="100000" sy="100000" kx="0" ky="0" algn="bl" rotWithShape="0" blurRad="114300" dist="38100" dir="8100000">
+            <a:outerShdw blurRad="114300" dist="38100" dir="8100000" algn="bl" rotWithShape="0">
               <a:srgbClr val="000000">
                 <a:alpha val="35000"/>
               </a:srgbClr>
             </a:outerShdw>
           </a:effectLst>
         </p:spPr>
+        <p:txBody>
+          <a:bodyPr/>
+          <a:lstStyle/>
+          <a:p>
+            <a:endParaRPr lang="ko-KR" altLang="en-US"/>
+          </a:p>
+        </p:txBody>
       </p:sp>
       <p:sp>
         <p:nvSpPr>
@@ -4062,6 +4390,13 @@
           </a:solidFill>
           <a:ln/>
         </p:spPr>
+        <p:txBody>
+          <a:bodyPr/>
+          <a:lstStyle/>
+          <a:p>
+            <a:endParaRPr lang="ko-KR" altLang="en-US"/>
+          </a:p>
+        </p:txBody>
       </p:sp>
       <p:sp>
         <p:nvSpPr>
@@ -4082,6 +4417,13 @@
           </a:solidFill>
           <a:ln/>
         </p:spPr>
+        <p:txBody>
+          <a:bodyPr/>
+          <a:lstStyle/>
+          <a:p>
+            <a:endParaRPr lang="ko-KR" altLang="en-US"/>
+          </a:p>
+        </p:txBody>
       </p:sp>
       <p:sp>
         <p:nvSpPr>
@@ -4102,6 +4444,13 @@
           </a:solidFill>
           <a:ln/>
         </p:spPr>
+        <p:txBody>
+          <a:bodyPr/>
+          <a:lstStyle/>
+          <a:p>
+            <a:endParaRPr lang="ko-KR" altLang="en-US"/>
+          </a:p>
+        </p:txBody>
       </p:sp>
       <p:sp>
         <p:nvSpPr>
@@ -4122,6 +4471,13 @@
           </a:solidFill>
           <a:ln/>
         </p:spPr>
+        <p:txBody>
+          <a:bodyPr/>
+          <a:lstStyle/>
+          <a:p>
+            <a:endParaRPr lang="ko-KR" altLang="en-US"/>
+          </a:p>
+        </p:txBody>
       </p:sp>
       <p:sp>
         <p:nvSpPr>
@@ -4144,7 +4500,7 @@
           <a:bodyPr wrap="square" lIns="0" tIns="0" rIns="0" bIns="0" rtlCol="0" anchor="ctr"/>
           <a:lstStyle/>
           <a:p>
-            <a:pPr indent="0" marL="0">
+            <a:pPr marL="0" indent="0">
               <a:buNone/>
             </a:pPr>
             <a:r>
@@ -4158,9 +4514,6 @@
               </a:rPr>
               <a:t>프레임워크·라이브러리 0개  </a:t>
             </a:r>
-            <a:pPr indent="0" marL="0">
-              <a:buNone/>
-            </a:pPr>
             <a:r>
               <a:rPr lang="en-US" sz="1600" dirty="0">
                 <a:solidFill>
@@ -4192,6 +4545,7 @@
         <a:solidFill>
           <a:srgbClr val="0F1117"/>
         </a:solidFill>
+        <a:effectLst/>
       </p:bgPr>
     </p:bg>
     <p:spTree>
@@ -4227,6 +4581,13 @@
           </a:solidFill>
           <a:ln/>
         </p:spPr>
+        <p:txBody>
+          <a:bodyPr/>
+          <a:lstStyle/>
+          <a:p>
+            <a:endParaRPr lang="ko-KR" altLang="en-US"/>
+          </a:p>
+        </p:txBody>
       </p:sp>
       <p:sp>
         <p:nvSpPr>
@@ -4249,7 +4610,7 @@
           <a:bodyPr wrap="square" lIns="0" tIns="0" rIns="0" bIns="0" rtlCol="0" anchor="ctr"/>
           <a:lstStyle/>
           <a:p>
-            <a:pPr algn="l" indent="0" marL="0">
+            <a:pPr marL="0" indent="0" algn="l">
               <a:buNone/>
             </a:pPr>
             <a:r>
@@ -4288,7 +4649,7 @@
           <a:bodyPr wrap="square" lIns="0" tIns="0" rIns="0" bIns="0" rtlCol="0" anchor="ctr"/>
           <a:lstStyle/>
           <a:p>
-            <a:pPr algn="l" indent="0" marL="0">
+            <a:pPr marL="0" indent="0" algn="l">
               <a:buNone/>
             </a:pPr>
             <a:r>
@@ -4325,6 +4686,13 @@
           </a:solidFill>
           <a:ln/>
         </p:spPr>
+        <p:txBody>
+          <a:bodyPr/>
+          <a:lstStyle/>
+          <a:p>
+            <a:endParaRPr lang="ko-KR" altLang="en-US"/>
+          </a:p>
+        </p:txBody>
       </p:sp>
       <p:sp>
         <p:nvSpPr>
@@ -4345,6 +4713,13 @@
           </a:solidFill>
           <a:ln/>
         </p:spPr>
+        <p:txBody>
+          <a:bodyPr/>
+          <a:lstStyle/>
+          <a:p>
+            <a:endParaRPr lang="ko-KR" altLang="en-US"/>
+          </a:p>
+        </p:txBody>
       </p:sp>
       <p:sp>
         <p:nvSpPr>
@@ -4365,6 +4740,13 @@
           </a:solidFill>
           <a:ln/>
         </p:spPr>
+        <p:txBody>
+          <a:bodyPr/>
+          <a:lstStyle/>
+          <a:p>
+            <a:endParaRPr lang="ko-KR" altLang="en-US"/>
+          </a:p>
+        </p:txBody>
       </p:sp>
       <p:sp>
         <p:nvSpPr>
@@ -4385,6 +4767,13 @@
           </a:solidFill>
           <a:ln/>
         </p:spPr>
+        <p:txBody>
+          <a:bodyPr/>
+          <a:lstStyle/>
+          <a:p>
+            <a:endParaRPr lang="ko-KR" altLang="en-US"/>
+          </a:p>
+        </p:txBody>
       </p:sp>
       <p:sp>
         <p:nvSpPr>
@@ -4407,24 +4796,31 @@
           </a:solidFill>
           <a:ln/>
           <a:effectLst>
-            <a:outerShdw sx="100000" sy="100000" kx="0" ky="0" algn="bl" rotWithShape="0" blurRad="114300" dist="38100" dir="8100000">
+            <a:outerShdw blurRad="114300" dist="38100" dir="8100000" algn="bl" rotWithShape="0">
               <a:srgbClr val="000000">
                 <a:alpha val="35000"/>
               </a:srgbClr>
             </a:outerShdw>
           </a:effectLst>
         </p:spPr>
+        <p:txBody>
+          <a:bodyPr/>
+          <a:lstStyle/>
+          <a:p>
+            <a:endParaRPr lang="ko-KR" altLang="en-US"/>
+          </a:p>
+        </p:txBody>
       </p:sp>
       <p:pic>
         <p:nvPicPr>
-          <p:cNvPr id="10" name="Image 0" descr="shot.png">    </p:cNvPr>
+          <p:cNvPr id="10" name="Image 0" descr="shot.png"/>
           <p:cNvPicPr>
             <a:picLocks noChangeAspect="1"/>
           </p:cNvPicPr>
           <p:nvPr/>
         </p:nvPicPr>
         <p:blipFill>
-          <a:blip r:embed="rId1"/>
+          <a:blip r:embed="rId3"/>
           <a:stretch>
             <a:fillRect/>
           </a:stretch>
@@ -4460,13 +4856,20 @@
           </a:solidFill>
           <a:ln/>
           <a:effectLst>
-            <a:outerShdw sx="100000" sy="100000" kx="0" ky="0" algn="bl" rotWithShape="0" blurRad="114300" dist="38100" dir="8100000">
+            <a:outerShdw blurRad="114300" dist="38100" dir="8100000" algn="bl" rotWithShape="0">
               <a:srgbClr val="000000">
                 <a:alpha val="35000"/>
               </a:srgbClr>
             </a:outerShdw>
           </a:effectLst>
         </p:spPr>
+        <p:txBody>
+          <a:bodyPr/>
+          <a:lstStyle/>
+          <a:p>
+            <a:endParaRPr lang="ko-KR" altLang="en-US"/>
+          </a:p>
+        </p:txBody>
       </p:sp>
       <p:sp>
         <p:nvSpPr>
@@ -4487,6 +4890,13 @@
           </a:solidFill>
           <a:ln/>
         </p:spPr>
+        <p:txBody>
+          <a:bodyPr/>
+          <a:lstStyle/>
+          <a:p>
+            <a:endParaRPr lang="ko-KR" altLang="en-US"/>
+          </a:p>
+        </p:txBody>
       </p:sp>
       <p:sp>
         <p:nvSpPr>
@@ -4509,7 +4919,7 @@
           <a:bodyPr wrap="square" lIns="0" tIns="0" rIns="0" bIns="0" rtlCol="0" anchor="ctr"/>
           <a:lstStyle/>
           <a:p>
-            <a:pPr indent="0" marL="0">
+            <a:pPr marL="0" indent="0">
               <a:buNone/>
             </a:pPr>
             <a:r>
@@ -4548,7 +4958,7 @@
           <a:bodyPr wrap="square" lIns="0" tIns="0" rIns="0" bIns="0" rtlCol="0" anchor="ctr"/>
           <a:lstStyle/>
           <a:p>
-            <a:pPr indent="0" marL="0">
+            <a:pPr marL="0" indent="0">
               <a:buNone/>
             </a:pPr>
             <a:r>
@@ -4587,13 +4997,20 @@
           </a:solidFill>
           <a:ln/>
           <a:effectLst>
-            <a:outerShdw sx="100000" sy="100000" kx="0" ky="0" algn="bl" rotWithShape="0" blurRad="114300" dist="38100" dir="8100000">
+            <a:outerShdw blurRad="114300" dist="38100" dir="8100000" algn="bl" rotWithShape="0">
               <a:srgbClr val="000000">
                 <a:alpha val="35000"/>
               </a:srgbClr>
             </a:outerShdw>
           </a:effectLst>
         </p:spPr>
+        <p:txBody>
+          <a:bodyPr/>
+          <a:lstStyle/>
+          <a:p>
+            <a:endParaRPr lang="ko-KR" altLang="en-US"/>
+          </a:p>
+        </p:txBody>
       </p:sp>
       <p:sp>
         <p:nvSpPr>
@@ -4614,6 +5031,13 @@
           </a:solidFill>
           <a:ln/>
         </p:spPr>
+        <p:txBody>
+          <a:bodyPr/>
+          <a:lstStyle/>
+          <a:p>
+            <a:endParaRPr lang="ko-KR" altLang="en-US"/>
+          </a:p>
+        </p:txBody>
       </p:sp>
       <p:sp>
         <p:nvSpPr>
@@ -4636,7 +5060,7 @@
           <a:bodyPr wrap="square" lIns="0" tIns="0" rIns="0" bIns="0" rtlCol="0" anchor="ctr"/>
           <a:lstStyle/>
           <a:p>
-            <a:pPr indent="0" marL="0">
+            <a:pPr marL="0" indent="0">
               <a:buNone/>
             </a:pPr>
             <a:r>
@@ -4675,7 +5099,7 @@
           <a:bodyPr wrap="square" lIns="0" tIns="0" rIns="0" bIns="0" rtlCol="0" anchor="ctr"/>
           <a:lstStyle/>
           <a:p>
-            <a:pPr indent="0" marL="0">
+            <a:pPr marL="0" indent="0">
               <a:buNone/>
             </a:pPr>
             <a:r>
@@ -4714,13 +5138,20 @@
           </a:solidFill>
           <a:ln/>
           <a:effectLst>
-            <a:outerShdw sx="100000" sy="100000" kx="0" ky="0" algn="bl" rotWithShape="0" blurRad="114300" dist="38100" dir="8100000">
+            <a:outerShdw blurRad="114300" dist="38100" dir="8100000" algn="bl" rotWithShape="0">
               <a:srgbClr val="000000">
                 <a:alpha val="35000"/>
               </a:srgbClr>
             </a:outerShdw>
           </a:effectLst>
         </p:spPr>
+        <p:txBody>
+          <a:bodyPr/>
+          <a:lstStyle/>
+          <a:p>
+            <a:endParaRPr lang="ko-KR" altLang="en-US"/>
+          </a:p>
+        </p:txBody>
       </p:sp>
       <p:sp>
         <p:nvSpPr>
@@ -4741,6 +5172,13 @@
           </a:solidFill>
           <a:ln/>
         </p:spPr>
+        <p:txBody>
+          <a:bodyPr/>
+          <a:lstStyle/>
+          <a:p>
+            <a:endParaRPr lang="ko-KR" altLang="en-US"/>
+          </a:p>
+        </p:txBody>
       </p:sp>
       <p:sp>
         <p:nvSpPr>
@@ -4763,7 +5201,7 @@
           <a:bodyPr wrap="square" lIns="0" tIns="0" rIns="0" bIns="0" rtlCol="0" anchor="ctr"/>
           <a:lstStyle/>
           <a:p>
-            <a:pPr indent="0" marL="0">
+            <a:pPr marL="0" indent="0">
               <a:buNone/>
             </a:pPr>
             <a:r>
@@ -4802,7 +5240,7 @@
           <a:bodyPr wrap="square" lIns="0" tIns="0" rIns="0" bIns="0" rtlCol="0" anchor="ctr"/>
           <a:lstStyle/>
           <a:p>
-            <a:pPr indent="0" marL="0">
+            <a:pPr marL="0" indent="0">
               <a:buNone/>
             </a:pPr>
             <a:r>
@@ -4841,13 +5279,20 @@
           </a:solidFill>
           <a:ln/>
           <a:effectLst>
-            <a:outerShdw sx="100000" sy="100000" kx="0" ky="0" algn="bl" rotWithShape="0" blurRad="114300" dist="38100" dir="8100000">
+            <a:outerShdw blurRad="114300" dist="38100" dir="8100000" algn="bl" rotWithShape="0">
               <a:srgbClr val="000000">
                 <a:alpha val="35000"/>
               </a:srgbClr>
             </a:outerShdw>
           </a:effectLst>
         </p:spPr>
+        <p:txBody>
+          <a:bodyPr/>
+          <a:lstStyle/>
+          <a:p>
+            <a:endParaRPr lang="ko-KR" altLang="en-US"/>
+          </a:p>
+        </p:txBody>
       </p:sp>
       <p:sp>
         <p:nvSpPr>
@@ -4868,6 +5313,13 @@
           </a:solidFill>
           <a:ln/>
         </p:spPr>
+        <p:txBody>
+          <a:bodyPr/>
+          <a:lstStyle/>
+          <a:p>
+            <a:endParaRPr lang="ko-KR" altLang="en-US"/>
+          </a:p>
+        </p:txBody>
       </p:sp>
       <p:sp>
         <p:nvSpPr>
@@ -4890,7 +5342,7 @@
           <a:bodyPr wrap="square" lIns="0" tIns="0" rIns="0" bIns="0" rtlCol="0" anchor="ctr"/>
           <a:lstStyle/>
           <a:p>
-            <a:pPr indent="0" marL="0">
+            <a:pPr marL="0" indent="0">
               <a:buNone/>
             </a:pPr>
             <a:r>
@@ -4929,7 +5381,7 @@
           <a:bodyPr wrap="square" lIns="0" tIns="0" rIns="0" bIns="0" rtlCol="0" anchor="ctr"/>
           <a:lstStyle/>
           <a:p>
-            <a:pPr indent="0" marL="0">
+            <a:pPr marL="0" indent="0">
               <a:buNone/>
             </a:pPr>
             <a:r>
@@ -4963,6 +5415,7 @@
         <a:solidFill>
           <a:srgbClr val="0F1117"/>
         </a:solidFill>
+        <a:effectLst/>
       </p:bgPr>
     </p:bg>
     <p:spTree>
@@ -4998,6 +5451,13 @@
           </a:solidFill>
           <a:ln/>
         </p:spPr>
+        <p:txBody>
+          <a:bodyPr/>
+          <a:lstStyle/>
+          <a:p>
+            <a:endParaRPr lang="ko-KR" altLang="en-US"/>
+          </a:p>
+        </p:txBody>
       </p:sp>
       <p:sp>
         <p:nvSpPr>
@@ -5020,7 +5480,7 @@
           <a:bodyPr wrap="square" lIns="0" tIns="0" rIns="0" bIns="0" rtlCol="0" anchor="ctr"/>
           <a:lstStyle/>
           <a:p>
-            <a:pPr algn="l" indent="0" marL="0">
+            <a:pPr marL="0" indent="0" algn="l">
               <a:buNone/>
             </a:pPr>
             <a:r>
@@ -5059,7 +5519,7 @@
           <a:bodyPr wrap="square" lIns="0" tIns="0" rIns="0" bIns="0" rtlCol="0" anchor="ctr"/>
           <a:lstStyle/>
           <a:p>
-            <a:pPr algn="l" indent="0" marL="0">
+            <a:pPr marL="0" indent="0" algn="l">
               <a:buNone/>
             </a:pPr>
             <a:r>
@@ -5096,6 +5556,13 @@
           </a:solidFill>
           <a:ln/>
         </p:spPr>
+        <p:txBody>
+          <a:bodyPr/>
+          <a:lstStyle/>
+          <a:p>
+            <a:endParaRPr lang="ko-KR" altLang="en-US"/>
+          </a:p>
+        </p:txBody>
       </p:sp>
       <p:sp>
         <p:nvSpPr>
@@ -5116,6 +5583,13 @@
           </a:solidFill>
           <a:ln/>
         </p:spPr>
+        <p:txBody>
+          <a:bodyPr/>
+          <a:lstStyle/>
+          <a:p>
+            <a:endParaRPr lang="ko-KR" altLang="en-US"/>
+          </a:p>
+        </p:txBody>
       </p:sp>
       <p:sp>
         <p:nvSpPr>
@@ -5136,6 +5610,13 @@
           </a:solidFill>
           <a:ln/>
         </p:spPr>
+        <p:txBody>
+          <a:bodyPr/>
+          <a:lstStyle/>
+          <a:p>
+            <a:endParaRPr lang="ko-KR" altLang="en-US"/>
+          </a:p>
+        </p:txBody>
       </p:sp>
       <p:sp>
         <p:nvSpPr>
@@ -5156,6 +5637,13 @@
           </a:solidFill>
           <a:ln/>
         </p:spPr>
+        <p:txBody>
+          <a:bodyPr/>
+          <a:lstStyle/>
+          <a:p>
+            <a:endParaRPr lang="ko-KR" altLang="en-US"/>
+          </a:p>
+        </p:txBody>
       </p:sp>
       <p:sp>
         <p:nvSpPr>
@@ -5178,13 +5666,20 @@
           </a:solidFill>
           <a:ln/>
           <a:effectLst>
-            <a:outerShdw sx="100000" sy="100000" kx="0" ky="0" algn="bl" rotWithShape="0" blurRad="114300" dist="38100" dir="8100000">
+            <a:outerShdw blurRad="114300" dist="38100" dir="8100000" algn="bl" rotWithShape="0">
               <a:srgbClr val="000000">
                 <a:alpha val="35000"/>
               </a:srgbClr>
             </a:outerShdw>
           </a:effectLst>
         </p:spPr>
+        <p:txBody>
+          <a:bodyPr/>
+          <a:lstStyle/>
+          <a:p>
+            <a:endParaRPr lang="ko-KR" altLang="en-US"/>
+          </a:p>
+        </p:txBody>
       </p:sp>
       <p:sp>
         <p:nvSpPr>
@@ -5205,6 +5700,13 @@
           </a:solidFill>
           <a:ln/>
         </p:spPr>
+        <p:txBody>
+          <a:bodyPr/>
+          <a:lstStyle/>
+          <a:p>
+            <a:endParaRPr lang="ko-KR" altLang="en-US"/>
+          </a:p>
+        </p:txBody>
       </p:sp>
       <p:sp>
         <p:nvSpPr>
@@ -5225,6 +5727,13 @@
           </a:solidFill>
           <a:ln/>
         </p:spPr>
+        <p:txBody>
+          <a:bodyPr/>
+          <a:lstStyle/>
+          <a:p>
+            <a:endParaRPr lang="ko-KR" altLang="en-US"/>
+          </a:p>
+        </p:txBody>
       </p:sp>
       <p:sp>
         <p:nvSpPr>
@@ -5245,6 +5754,13 @@
           </a:solidFill>
           <a:ln/>
         </p:spPr>
+        <p:txBody>
+          <a:bodyPr/>
+          <a:lstStyle/>
+          <a:p>
+            <a:endParaRPr lang="ko-KR" altLang="en-US"/>
+          </a:p>
+        </p:txBody>
       </p:sp>
       <p:sp>
         <p:nvSpPr>
@@ -5265,6 +5781,13 @@
           </a:solidFill>
           <a:ln/>
         </p:spPr>
+        <p:txBody>
+          <a:bodyPr/>
+          <a:lstStyle/>
+          <a:p>
+            <a:endParaRPr lang="ko-KR" altLang="en-US"/>
+          </a:p>
+        </p:txBody>
       </p:sp>
       <p:sp>
         <p:nvSpPr>
@@ -5287,7 +5810,7 @@
           <a:bodyPr wrap="square" lIns="0" tIns="0" rIns="0" bIns="0" rtlCol="0" anchor="ctr"/>
           <a:lstStyle/>
           <a:p>
-            <a:pPr indent="0" marL="0">
+            <a:pPr marL="0" indent="0">
               <a:buNone/>
             </a:pPr>
             <a:r>
@@ -5326,7 +5849,7 @@
           <a:bodyPr wrap="square" lIns="0" tIns="0" rIns="0" bIns="0" rtlCol="0" anchor="ctr"/>
           <a:lstStyle/>
           <a:p>
-            <a:pPr indent="0" marL="0">
+            <a:pPr marL="0" indent="0">
               <a:lnSpc>
                 <a:spcPct val="120000"/>
               </a:lnSpc>
@@ -5346,7 +5869,7 @@
             <a:endParaRPr lang="en-US" sz="1400" dirty="0"/>
           </a:p>
           <a:p>
-            <a:pPr indent="0" marL="0">
+            <a:pPr marL="0" indent="0">
               <a:lnSpc>
                 <a:spcPct val="120000"/>
               </a:lnSpc>
@@ -5388,13 +5911,20 @@
           </a:solidFill>
           <a:ln/>
           <a:effectLst>
-            <a:outerShdw sx="100000" sy="100000" kx="0" ky="0" algn="bl" rotWithShape="0" blurRad="114300" dist="38100" dir="8100000">
+            <a:outerShdw blurRad="114300" dist="38100" dir="8100000" algn="bl" rotWithShape="0">
               <a:srgbClr val="000000">
                 <a:alpha val="35000"/>
               </a:srgbClr>
             </a:outerShdw>
           </a:effectLst>
         </p:spPr>
+        <p:txBody>
+          <a:bodyPr/>
+          <a:lstStyle/>
+          <a:p>
+            <a:endParaRPr lang="ko-KR" altLang="en-US"/>
+          </a:p>
+        </p:txBody>
       </p:sp>
       <p:sp>
         <p:nvSpPr>
@@ -5415,6 +5945,13 @@
           </a:solidFill>
           <a:ln/>
         </p:spPr>
+        <p:txBody>
+          <a:bodyPr/>
+          <a:lstStyle/>
+          <a:p>
+            <a:endParaRPr lang="ko-KR" altLang="en-US"/>
+          </a:p>
+        </p:txBody>
       </p:sp>
       <p:sp>
         <p:nvSpPr>
@@ -5435,6 +5972,13 @@
           </a:solidFill>
           <a:ln/>
         </p:spPr>
+        <p:txBody>
+          <a:bodyPr/>
+          <a:lstStyle/>
+          <a:p>
+            <a:endParaRPr lang="ko-KR" altLang="en-US"/>
+          </a:p>
+        </p:txBody>
       </p:sp>
       <p:sp>
         <p:nvSpPr>
@@ -5455,6 +5999,13 @@
           </a:solidFill>
           <a:ln/>
         </p:spPr>
+        <p:txBody>
+          <a:bodyPr/>
+          <a:lstStyle/>
+          <a:p>
+            <a:endParaRPr lang="ko-KR" altLang="en-US"/>
+          </a:p>
+        </p:txBody>
       </p:sp>
       <p:sp>
         <p:nvSpPr>
@@ -5475,6 +6026,13 @@
           </a:solidFill>
           <a:ln/>
         </p:spPr>
+        <p:txBody>
+          <a:bodyPr/>
+          <a:lstStyle/>
+          <a:p>
+            <a:endParaRPr lang="ko-KR" altLang="en-US"/>
+          </a:p>
+        </p:txBody>
       </p:sp>
       <p:sp>
         <p:nvSpPr>
@@ -5497,7 +6055,7 @@
           <a:bodyPr wrap="square" lIns="0" tIns="0" rIns="0" bIns="0" rtlCol="0" anchor="ctr"/>
           <a:lstStyle/>
           <a:p>
-            <a:pPr indent="0" marL="0">
+            <a:pPr marL="0" indent="0">
               <a:buNone/>
             </a:pPr>
             <a:r>
@@ -5536,7 +6094,7 @@
           <a:bodyPr wrap="square" lIns="0" tIns="0" rIns="0" bIns="0" rtlCol="0" anchor="ctr"/>
           <a:lstStyle/>
           <a:p>
-            <a:pPr indent="0" marL="0">
+            <a:pPr marL="0" indent="0">
               <a:lnSpc>
                 <a:spcPct val="120000"/>
               </a:lnSpc>
@@ -5556,7 +6114,7 @@
             <a:endParaRPr lang="en-US" sz="1400" dirty="0"/>
           </a:p>
           <a:p>
-            <a:pPr indent="0" marL="0">
+            <a:pPr marL="0" indent="0">
               <a:lnSpc>
                 <a:spcPct val="120000"/>
               </a:lnSpc>
@@ -5598,13 +6156,20 @@
           </a:solidFill>
           <a:ln/>
           <a:effectLst>
-            <a:outerShdw sx="100000" sy="100000" kx="0" ky="0" algn="bl" rotWithShape="0" blurRad="114300" dist="38100" dir="8100000">
+            <a:outerShdw blurRad="114300" dist="38100" dir="8100000" algn="bl" rotWithShape="0">
               <a:srgbClr val="000000">
                 <a:alpha val="35000"/>
               </a:srgbClr>
             </a:outerShdw>
           </a:effectLst>
         </p:spPr>
+        <p:txBody>
+          <a:bodyPr/>
+          <a:lstStyle/>
+          <a:p>
+            <a:endParaRPr lang="ko-KR" altLang="en-US"/>
+          </a:p>
+        </p:txBody>
       </p:sp>
       <p:sp>
         <p:nvSpPr>
@@ -5625,6 +6190,13 @@
           </a:solidFill>
           <a:ln/>
         </p:spPr>
+        <p:txBody>
+          <a:bodyPr/>
+          <a:lstStyle/>
+          <a:p>
+            <a:endParaRPr lang="ko-KR" altLang="en-US"/>
+          </a:p>
+        </p:txBody>
       </p:sp>
       <p:sp>
         <p:nvSpPr>
@@ -5645,6 +6217,13 @@
           </a:solidFill>
           <a:ln/>
         </p:spPr>
+        <p:txBody>
+          <a:bodyPr/>
+          <a:lstStyle/>
+          <a:p>
+            <a:endParaRPr lang="ko-KR" altLang="en-US"/>
+          </a:p>
+        </p:txBody>
       </p:sp>
       <p:sp>
         <p:nvSpPr>
@@ -5665,6 +6244,13 @@
           </a:solidFill>
           <a:ln/>
         </p:spPr>
+        <p:txBody>
+          <a:bodyPr/>
+          <a:lstStyle/>
+          <a:p>
+            <a:endParaRPr lang="ko-KR" altLang="en-US"/>
+          </a:p>
+        </p:txBody>
       </p:sp>
       <p:sp>
         <p:nvSpPr>
@@ -5685,6 +6271,13 @@
           </a:solidFill>
           <a:ln/>
         </p:spPr>
+        <p:txBody>
+          <a:bodyPr/>
+          <a:lstStyle/>
+          <a:p>
+            <a:endParaRPr lang="ko-KR" altLang="en-US"/>
+          </a:p>
+        </p:txBody>
       </p:sp>
       <p:sp>
         <p:nvSpPr>
@@ -5707,7 +6300,7 @@
           <a:bodyPr wrap="square" lIns="0" tIns="0" rIns="0" bIns="0" rtlCol="0" anchor="ctr"/>
           <a:lstStyle/>
           <a:p>
-            <a:pPr indent="0" marL="0">
+            <a:pPr marL="0" indent="0">
               <a:buNone/>
             </a:pPr>
             <a:r>
@@ -5746,7 +6339,7 @@
           <a:bodyPr wrap="square" lIns="0" tIns="0" rIns="0" bIns="0" rtlCol="0" anchor="ctr"/>
           <a:lstStyle/>
           <a:p>
-            <a:pPr indent="0" marL="0">
+            <a:pPr marL="0" indent="0">
               <a:lnSpc>
                 <a:spcPct val="120000"/>
               </a:lnSpc>
@@ -5766,7 +6359,7 @@
             <a:endParaRPr lang="en-US" sz="1400" dirty="0"/>
           </a:p>
           <a:p>
-            <a:pPr indent="0" marL="0">
+            <a:pPr marL="0" indent="0">
               <a:lnSpc>
                 <a:spcPct val="120000"/>
               </a:lnSpc>
@@ -5808,13 +6401,20 @@
           </a:solidFill>
           <a:ln/>
           <a:effectLst>
-            <a:outerShdw sx="100000" sy="100000" kx="0" ky="0" algn="bl" rotWithShape="0" blurRad="114300" dist="38100" dir="8100000">
+            <a:outerShdw blurRad="114300" dist="38100" dir="8100000" algn="bl" rotWithShape="0">
               <a:srgbClr val="000000">
                 <a:alpha val="35000"/>
               </a:srgbClr>
             </a:outerShdw>
           </a:effectLst>
         </p:spPr>
+        <p:txBody>
+          <a:bodyPr/>
+          <a:lstStyle/>
+          <a:p>
+            <a:endParaRPr lang="ko-KR" altLang="en-US"/>
+          </a:p>
+        </p:txBody>
       </p:sp>
       <p:sp>
         <p:nvSpPr>
@@ -5835,6 +6435,13 @@
           </a:solidFill>
           <a:ln/>
         </p:spPr>
+        <p:txBody>
+          <a:bodyPr/>
+          <a:lstStyle/>
+          <a:p>
+            <a:endParaRPr lang="ko-KR" altLang="en-US"/>
+          </a:p>
+        </p:txBody>
       </p:sp>
       <p:sp>
         <p:nvSpPr>
@@ -5855,6 +6462,13 @@
           </a:solidFill>
           <a:ln/>
         </p:spPr>
+        <p:txBody>
+          <a:bodyPr/>
+          <a:lstStyle/>
+          <a:p>
+            <a:endParaRPr lang="ko-KR" altLang="en-US"/>
+          </a:p>
+        </p:txBody>
       </p:sp>
       <p:sp>
         <p:nvSpPr>
@@ -5875,6 +6489,13 @@
           </a:solidFill>
           <a:ln/>
         </p:spPr>
+        <p:txBody>
+          <a:bodyPr/>
+          <a:lstStyle/>
+          <a:p>
+            <a:endParaRPr lang="ko-KR" altLang="en-US"/>
+          </a:p>
+        </p:txBody>
       </p:sp>
       <p:sp>
         <p:nvSpPr>
@@ -5895,6 +6516,13 @@
           </a:solidFill>
           <a:ln/>
         </p:spPr>
+        <p:txBody>
+          <a:bodyPr/>
+          <a:lstStyle/>
+          <a:p>
+            <a:endParaRPr lang="ko-KR" altLang="en-US"/>
+          </a:p>
+        </p:txBody>
       </p:sp>
       <p:sp>
         <p:nvSpPr>
@@ -5917,7 +6545,7 @@
           <a:bodyPr wrap="square" lIns="0" tIns="0" rIns="0" bIns="0" rtlCol="0" anchor="ctr"/>
           <a:lstStyle/>
           <a:p>
-            <a:pPr indent="0" marL="0">
+            <a:pPr marL="0" indent="0">
               <a:buNone/>
             </a:pPr>
             <a:r>
@@ -5956,7 +6584,7 @@
           <a:bodyPr wrap="square" lIns="0" tIns="0" rIns="0" bIns="0" rtlCol="0" anchor="ctr"/>
           <a:lstStyle/>
           <a:p>
-            <a:pPr indent="0" marL="0">
+            <a:pPr marL="0" indent="0">
               <a:lnSpc>
                 <a:spcPct val="120000"/>
               </a:lnSpc>
@@ -5976,7 +6604,7 @@
             <a:endParaRPr lang="en-US" sz="1400" dirty="0"/>
           </a:p>
           <a:p>
-            <a:pPr indent="0" marL="0">
+            <a:pPr marL="0" indent="0">
               <a:lnSpc>
                 <a:spcPct val="120000"/>
               </a:lnSpc>
@@ -6018,13 +6646,20 @@
           </a:solidFill>
           <a:ln/>
           <a:effectLst>
-            <a:outerShdw sx="100000" sy="100000" kx="0" ky="0" algn="bl" rotWithShape="0" blurRad="114300" dist="38100" dir="8100000">
+            <a:outerShdw blurRad="114300" dist="38100" dir="8100000" algn="bl" rotWithShape="0">
               <a:srgbClr val="000000">
                 <a:alpha val="35000"/>
               </a:srgbClr>
             </a:outerShdw>
           </a:effectLst>
         </p:spPr>
+        <p:txBody>
+          <a:bodyPr/>
+          <a:lstStyle/>
+          <a:p>
+            <a:endParaRPr lang="ko-KR" altLang="en-US"/>
+          </a:p>
+        </p:txBody>
       </p:sp>
       <p:sp>
         <p:nvSpPr>
@@ -6045,6 +6680,13 @@
           </a:solidFill>
           <a:ln/>
         </p:spPr>
+        <p:txBody>
+          <a:bodyPr/>
+          <a:lstStyle/>
+          <a:p>
+            <a:endParaRPr lang="ko-KR" altLang="en-US"/>
+          </a:p>
+        </p:txBody>
       </p:sp>
       <p:sp>
         <p:nvSpPr>
@@ -6065,6 +6707,13 @@
           </a:solidFill>
           <a:ln/>
         </p:spPr>
+        <p:txBody>
+          <a:bodyPr/>
+          <a:lstStyle/>
+          <a:p>
+            <a:endParaRPr lang="ko-KR" altLang="en-US"/>
+          </a:p>
+        </p:txBody>
       </p:sp>
       <p:sp>
         <p:nvSpPr>
@@ -6085,6 +6734,13 @@
           </a:solidFill>
           <a:ln/>
         </p:spPr>
+        <p:txBody>
+          <a:bodyPr/>
+          <a:lstStyle/>
+          <a:p>
+            <a:endParaRPr lang="ko-KR" altLang="en-US"/>
+          </a:p>
+        </p:txBody>
       </p:sp>
       <p:sp>
         <p:nvSpPr>
@@ -6105,6 +6761,13 @@
           </a:solidFill>
           <a:ln/>
         </p:spPr>
+        <p:txBody>
+          <a:bodyPr/>
+          <a:lstStyle/>
+          <a:p>
+            <a:endParaRPr lang="ko-KR" altLang="en-US"/>
+          </a:p>
+        </p:txBody>
       </p:sp>
       <p:sp>
         <p:nvSpPr>
@@ -6127,7 +6790,7 @@
           <a:bodyPr wrap="square" lIns="0" tIns="0" rIns="0" bIns="0" rtlCol="0" anchor="ctr"/>
           <a:lstStyle/>
           <a:p>
-            <a:pPr indent="0" marL="0">
+            <a:pPr marL="0" indent="0">
               <a:buNone/>
             </a:pPr>
             <a:r>
@@ -6166,7 +6829,7 @@
           <a:bodyPr wrap="square" lIns="0" tIns="0" rIns="0" bIns="0" rtlCol="0" anchor="ctr"/>
           <a:lstStyle/>
           <a:p>
-            <a:pPr indent="0" marL="0">
+            <a:pPr marL="0" indent="0">
               <a:lnSpc>
                 <a:spcPct val="120000"/>
               </a:lnSpc>
@@ -6186,7 +6849,7 @@
             <a:endParaRPr lang="en-US" sz="1400" dirty="0"/>
           </a:p>
           <a:p>
-            <a:pPr indent="0" marL="0">
+            <a:pPr marL="0" indent="0">
               <a:lnSpc>
                 <a:spcPct val="120000"/>
               </a:lnSpc>
@@ -6228,13 +6891,20 @@
           </a:solidFill>
           <a:ln/>
           <a:effectLst>
-            <a:outerShdw sx="100000" sy="100000" kx="0" ky="0" algn="bl" rotWithShape="0" blurRad="114300" dist="38100" dir="8100000">
+            <a:outerShdw blurRad="114300" dist="38100" dir="8100000" algn="bl" rotWithShape="0">
               <a:srgbClr val="000000">
                 <a:alpha val="35000"/>
               </a:srgbClr>
             </a:outerShdw>
           </a:effectLst>
         </p:spPr>
+        <p:txBody>
+          <a:bodyPr/>
+          <a:lstStyle/>
+          <a:p>
+            <a:endParaRPr lang="ko-KR" altLang="en-US"/>
+          </a:p>
+        </p:txBody>
       </p:sp>
       <p:sp>
         <p:nvSpPr>
@@ -6257,7 +6927,7 @@
           <a:bodyPr wrap="square" lIns="0" tIns="0" rIns="0" bIns="0" rtlCol="0" anchor="ctr"/>
           <a:lstStyle/>
           <a:p>
-            <a:pPr algn="ctr" indent="0" marL="0">
+            <a:pPr marL="0" indent="0" algn="ctr">
               <a:lnSpc>
                 <a:spcPct val="130000"/>
               </a:lnSpc>
@@ -6277,7 +6947,7 @@
             <a:endParaRPr lang="en-US" sz="1600" dirty="0"/>
           </a:p>
           <a:p>
-            <a:pPr algn="ctr" indent="0" marL="0">
+            <a:pPr marL="0" indent="0" algn="ctr">
               <a:lnSpc>
                 <a:spcPct val="130000"/>
               </a:lnSpc>
@@ -6314,6 +6984,7 @@
         <a:solidFill>
           <a:srgbClr val="0F1117"/>
         </a:solidFill>
+        <a:effectLst/>
       </p:bgPr>
     </p:bg>
     <p:spTree>
@@ -6349,6 +7020,13 @@
           </a:solidFill>
           <a:ln/>
         </p:spPr>
+        <p:txBody>
+          <a:bodyPr/>
+          <a:lstStyle/>
+          <a:p>
+            <a:endParaRPr lang="ko-KR" altLang="en-US"/>
+          </a:p>
+        </p:txBody>
       </p:sp>
       <p:sp>
         <p:nvSpPr>
@@ -6371,7 +7049,7 @@
           <a:bodyPr wrap="square" lIns="0" tIns="0" rIns="0" bIns="0" rtlCol="0" anchor="ctr"/>
           <a:lstStyle/>
           <a:p>
-            <a:pPr algn="l" indent="0" marL="0">
+            <a:pPr marL="0" indent="0" algn="l">
               <a:buNone/>
             </a:pPr>
             <a:r>
@@ -6410,7 +7088,7 @@
           <a:bodyPr wrap="square" lIns="0" tIns="0" rIns="0" bIns="0" rtlCol="0" anchor="ctr"/>
           <a:lstStyle/>
           <a:p>
-            <a:pPr algn="l" indent="0" marL="0">
+            <a:pPr marL="0" indent="0" algn="l">
               <a:buNone/>
             </a:pPr>
             <a:r>
@@ -6447,6 +7125,13 @@
           </a:solidFill>
           <a:ln/>
         </p:spPr>
+        <p:txBody>
+          <a:bodyPr/>
+          <a:lstStyle/>
+          <a:p>
+            <a:endParaRPr lang="ko-KR" altLang="en-US"/>
+          </a:p>
+        </p:txBody>
       </p:sp>
       <p:sp>
         <p:nvSpPr>
@@ -6467,6 +7152,13 @@
           </a:solidFill>
           <a:ln/>
         </p:spPr>
+        <p:txBody>
+          <a:bodyPr/>
+          <a:lstStyle/>
+          <a:p>
+            <a:endParaRPr lang="ko-KR" altLang="en-US"/>
+          </a:p>
+        </p:txBody>
       </p:sp>
       <p:sp>
         <p:nvSpPr>
@@ -6487,6 +7179,13 @@
           </a:solidFill>
           <a:ln/>
         </p:spPr>
+        <p:txBody>
+          <a:bodyPr/>
+          <a:lstStyle/>
+          <a:p>
+            <a:endParaRPr lang="ko-KR" altLang="en-US"/>
+          </a:p>
+        </p:txBody>
       </p:sp>
       <p:sp>
         <p:nvSpPr>
@@ -6507,6 +7206,13 @@
           </a:solidFill>
           <a:ln/>
         </p:spPr>
+        <p:txBody>
+          <a:bodyPr/>
+          <a:lstStyle/>
+          <a:p>
+            <a:endParaRPr lang="ko-KR" altLang="en-US"/>
+          </a:p>
+        </p:txBody>
       </p:sp>
       <p:sp>
         <p:nvSpPr>
@@ -6529,13 +7235,20 @@
           </a:solidFill>
           <a:ln/>
           <a:effectLst>
-            <a:outerShdw sx="100000" sy="100000" kx="0" ky="0" algn="bl" rotWithShape="0" blurRad="114300" dist="38100" dir="8100000">
+            <a:outerShdw blurRad="114300" dist="38100" dir="8100000" algn="bl" rotWithShape="0">
               <a:srgbClr val="000000">
                 <a:alpha val="35000"/>
               </a:srgbClr>
             </a:outerShdw>
           </a:effectLst>
         </p:spPr>
+        <p:txBody>
+          <a:bodyPr/>
+          <a:lstStyle/>
+          <a:p>
+            <a:endParaRPr lang="ko-KR" altLang="en-US"/>
+          </a:p>
+        </p:txBody>
       </p:sp>
       <p:sp>
         <p:nvSpPr>
@@ -6556,6 +7269,13 @@
           </a:solidFill>
           <a:ln/>
         </p:spPr>
+        <p:txBody>
+          <a:bodyPr/>
+          <a:lstStyle/>
+          <a:p>
+            <a:endParaRPr lang="ko-KR" altLang="en-US"/>
+          </a:p>
+        </p:txBody>
       </p:sp>
       <p:sp>
         <p:nvSpPr>
@@ -6578,7 +7298,7 @@
           <a:bodyPr wrap="square" lIns="0" tIns="0" rIns="0" bIns="0" rtlCol="0" anchor="ctr"/>
           <a:lstStyle/>
           <a:p>
-            <a:pPr indent="0" marL="0">
+            <a:pPr marL="0" indent="0">
               <a:buNone/>
             </a:pPr>
             <a:r>
@@ -6617,6 +7337,13 @@
           </a:solidFill>
           <a:ln/>
         </p:spPr>
+        <p:txBody>
+          <a:bodyPr/>
+          <a:lstStyle/>
+          <a:p>
+            <a:endParaRPr lang="ko-KR" altLang="en-US"/>
+          </a:p>
+        </p:txBody>
       </p:sp>
       <p:sp>
         <p:nvSpPr>
@@ -6639,7 +7366,7 @@
           <a:bodyPr wrap="square" lIns="0" tIns="0" rIns="0" bIns="0" rtlCol="0" anchor="t"/>
           <a:lstStyle/>
           <a:p>
-            <a:pPr algn="l" indent="0" marL="0">
+            <a:pPr marL="0" indent="0" algn="l">
               <a:lnSpc>
                 <a:spcPct val="115000"/>
               </a:lnSpc>
@@ -6659,7 +7386,7 @@
             <a:endParaRPr lang="en-US" sz="1150" dirty="0"/>
           </a:p>
           <a:p>
-            <a:pPr algn="l" indent="0" marL="0">
+            <a:pPr marL="0" indent="0" algn="l">
               <a:lnSpc>
                 <a:spcPct val="115000"/>
               </a:lnSpc>
@@ -6679,7 +7406,7 @@
             <a:endParaRPr lang="en-US" sz="1150" dirty="0"/>
           </a:p>
           <a:p>
-            <a:pPr algn="l" indent="0" marL="0">
+            <a:pPr marL="0" indent="0" algn="l">
               <a:lnSpc>
                 <a:spcPct val="115000"/>
               </a:lnSpc>
@@ -6699,7 +7426,7 @@
             <a:endParaRPr lang="en-US" sz="1150" dirty="0"/>
           </a:p>
           <a:p>
-            <a:pPr algn="l" indent="0" marL="0">
+            <a:pPr marL="0" indent="0" algn="l">
               <a:lnSpc>
                 <a:spcPct val="115000"/>
               </a:lnSpc>
@@ -6719,7 +7446,7 @@
             <a:endParaRPr lang="en-US" sz="1150" dirty="0"/>
           </a:p>
           <a:p>
-            <a:pPr algn="l" indent="0" marL="0">
+            <a:pPr marL="0" indent="0" algn="l">
               <a:lnSpc>
                 <a:spcPct val="115000"/>
               </a:lnSpc>
@@ -6739,7 +7466,7 @@
             <a:endParaRPr lang="en-US" sz="1150" dirty="0"/>
           </a:p>
           <a:p>
-            <a:pPr algn="l" indent="0" marL="0">
+            <a:pPr marL="0" indent="0" algn="l">
               <a:lnSpc>
                 <a:spcPct val="115000"/>
               </a:lnSpc>
@@ -6759,7 +7486,7 @@
             <a:endParaRPr lang="en-US" sz="1150" dirty="0"/>
           </a:p>
           <a:p>
-            <a:pPr algn="l" indent="0" marL="0">
+            <a:pPr marL="0" indent="0" algn="l">
               <a:lnSpc>
                 <a:spcPct val="115000"/>
               </a:lnSpc>
@@ -6801,13 +7528,20 @@
           </a:solidFill>
           <a:ln/>
           <a:effectLst>
-            <a:outerShdw sx="100000" sy="100000" kx="0" ky="0" algn="bl" rotWithShape="0" blurRad="114300" dist="38100" dir="8100000">
+            <a:outerShdw blurRad="114300" dist="38100" dir="8100000" algn="bl" rotWithShape="0">
               <a:srgbClr val="000000">
                 <a:alpha val="35000"/>
               </a:srgbClr>
             </a:outerShdw>
           </a:effectLst>
         </p:spPr>
+        <p:txBody>
+          <a:bodyPr/>
+          <a:lstStyle/>
+          <a:p>
+            <a:endParaRPr lang="ko-KR" altLang="en-US"/>
+          </a:p>
+        </p:txBody>
       </p:sp>
       <p:sp>
         <p:nvSpPr>
@@ -6828,6 +7562,13 @@
           </a:solidFill>
           <a:ln/>
         </p:spPr>
+        <p:txBody>
+          <a:bodyPr/>
+          <a:lstStyle/>
+          <a:p>
+            <a:endParaRPr lang="ko-KR" altLang="en-US"/>
+          </a:p>
+        </p:txBody>
       </p:sp>
       <p:sp>
         <p:nvSpPr>
@@ -6850,7 +7591,7 @@
           <a:bodyPr wrap="square" lIns="0" tIns="0" rIns="0" bIns="0" rtlCol="0" anchor="ctr"/>
           <a:lstStyle/>
           <a:p>
-            <a:pPr indent="0" marL="0">
+            <a:pPr marL="0" indent="0">
               <a:buNone/>
             </a:pPr>
             <a:r>
@@ -6889,6 +7630,13 @@
           </a:solidFill>
           <a:ln/>
         </p:spPr>
+        <p:txBody>
+          <a:bodyPr/>
+          <a:lstStyle/>
+          <a:p>
+            <a:endParaRPr lang="ko-KR" altLang="en-US"/>
+          </a:p>
+        </p:txBody>
       </p:sp>
       <p:sp>
         <p:nvSpPr>
@@ -6911,7 +7659,7 @@
           <a:bodyPr wrap="square" lIns="0" tIns="0" rIns="0" bIns="0" rtlCol="0" anchor="t"/>
           <a:lstStyle/>
           <a:p>
-            <a:pPr algn="l" indent="0" marL="0">
+            <a:pPr marL="0" indent="0" algn="l">
               <a:lnSpc>
                 <a:spcPct val="115000"/>
               </a:lnSpc>
@@ -6931,7 +7679,7 @@
             <a:endParaRPr lang="en-US" sz="1150" dirty="0"/>
           </a:p>
           <a:p>
-            <a:pPr algn="l" indent="0" marL="0">
+            <a:pPr marL="0" indent="0" algn="l">
               <a:lnSpc>
                 <a:spcPct val="115000"/>
               </a:lnSpc>
@@ -6951,7 +7699,7 @@
             <a:endParaRPr lang="en-US" sz="1150" dirty="0"/>
           </a:p>
           <a:p>
-            <a:pPr algn="l" indent="0" marL="0">
+            <a:pPr marL="0" indent="0" algn="l">
               <a:lnSpc>
                 <a:spcPct val="115000"/>
               </a:lnSpc>
@@ -6971,7 +7719,7 @@
             <a:endParaRPr lang="en-US" sz="1150" dirty="0"/>
           </a:p>
           <a:p>
-            <a:pPr algn="l" indent="0" marL="0">
+            <a:pPr marL="0" indent="0" algn="l">
               <a:lnSpc>
                 <a:spcPct val="115000"/>
               </a:lnSpc>
@@ -6991,7 +7739,7 @@
             <a:endParaRPr lang="en-US" sz="1150" dirty="0"/>
           </a:p>
           <a:p>
-            <a:pPr algn="l" indent="0" marL="0">
+            <a:pPr marL="0" indent="0" algn="l">
               <a:lnSpc>
                 <a:spcPct val="115000"/>
               </a:lnSpc>
@@ -7011,7 +7759,7 @@
             <a:endParaRPr lang="en-US" sz="1150" dirty="0"/>
           </a:p>
           <a:p>
-            <a:pPr algn="l" indent="0" marL="0">
+            <a:pPr marL="0" indent="0" algn="l">
               <a:lnSpc>
                 <a:spcPct val="115000"/>
               </a:lnSpc>
@@ -7031,7 +7779,7 @@
             <a:endParaRPr lang="en-US" sz="1150" dirty="0"/>
           </a:p>
           <a:p>
-            <a:pPr algn="l" indent="0" marL="0">
+            <a:pPr marL="0" indent="0" algn="l">
               <a:lnSpc>
                 <a:spcPct val="115000"/>
               </a:lnSpc>
@@ -7073,13 +7821,20 @@
           </a:solidFill>
           <a:ln/>
           <a:effectLst>
-            <a:outerShdw sx="100000" sy="100000" kx="0" ky="0" algn="bl" rotWithShape="0" blurRad="114300" dist="38100" dir="8100000">
+            <a:outerShdw blurRad="114300" dist="38100" dir="8100000" algn="bl" rotWithShape="0">
               <a:srgbClr val="000000">
                 <a:alpha val="35000"/>
               </a:srgbClr>
             </a:outerShdw>
           </a:effectLst>
         </p:spPr>
+        <p:txBody>
+          <a:bodyPr/>
+          <a:lstStyle/>
+          <a:p>
+            <a:endParaRPr lang="ko-KR" altLang="en-US"/>
+          </a:p>
+        </p:txBody>
       </p:sp>
       <p:sp>
         <p:nvSpPr>
@@ -7100,6 +7855,13 @@
           </a:solidFill>
           <a:ln/>
         </p:spPr>
+        <p:txBody>
+          <a:bodyPr/>
+          <a:lstStyle/>
+          <a:p>
+            <a:endParaRPr lang="ko-KR" altLang="en-US"/>
+          </a:p>
+        </p:txBody>
       </p:sp>
       <p:sp>
         <p:nvSpPr>
@@ -7122,7 +7884,7 @@
           <a:bodyPr wrap="square" lIns="0" tIns="0" rIns="0" bIns="0" rtlCol="0" anchor="ctr"/>
           <a:lstStyle/>
           <a:p>
-            <a:pPr indent="0" marL="0">
+            <a:pPr marL="0" indent="0">
               <a:buNone/>
             </a:pPr>
             <a:r>
@@ -7161,6 +7923,13 @@
           </a:solidFill>
           <a:ln/>
         </p:spPr>
+        <p:txBody>
+          <a:bodyPr/>
+          <a:lstStyle/>
+          <a:p>
+            <a:endParaRPr lang="ko-KR" altLang="en-US"/>
+          </a:p>
+        </p:txBody>
       </p:sp>
       <p:sp>
         <p:nvSpPr>
@@ -7183,7 +7952,7 @@
           <a:bodyPr wrap="square" lIns="0" tIns="0" rIns="0" bIns="0" rtlCol="0" anchor="t"/>
           <a:lstStyle/>
           <a:p>
-            <a:pPr algn="l" indent="0" marL="0">
+            <a:pPr marL="0" indent="0" algn="l">
               <a:lnSpc>
                 <a:spcPct val="115000"/>
               </a:lnSpc>
@@ -7203,7 +7972,7 @@
             <a:endParaRPr lang="en-US" sz="1150" dirty="0"/>
           </a:p>
           <a:p>
-            <a:pPr algn="l" indent="0" marL="0">
+            <a:pPr marL="0" indent="0" algn="l">
               <a:lnSpc>
                 <a:spcPct val="115000"/>
               </a:lnSpc>
@@ -7223,7 +7992,7 @@
             <a:endParaRPr lang="en-US" sz="1150" dirty="0"/>
           </a:p>
           <a:p>
-            <a:pPr algn="l" indent="0" marL="0">
+            <a:pPr marL="0" indent="0" algn="l">
               <a:lnSpc>
                 <a:spcPct val="115000"/>
               </a:lnSpc>
@@ -7243,7 +8012,7 @@
             <a:endParaRPr lang="en-US" sz="1150" dirty="0"/>
           </a:p>
           <a:p>
-            <a:pPr algn="l" indent="0" marL="0">
+            <a:pPr marL="0" indent="0" algn="l">
               <a:lnSpc>
                 <a:spcPct val="115000"/>
               </a:lnSpc>
@@ -7263,7 +8032,7 @@
             <a:endParaRPr lang="en-US" sz="1150" dirty="0"/>
           </a:p>
           <a:p>
-            <a:pPr algn="l" indent="0" marL="0">
+            <a:pPr marL="0" indent="0" algn="l">
               <a:lnSpc>
                 <a:spcPct val="115000"/>
               </a:lnSpc>
@@ -7300,6 +8069,7 @@
         <a:solidFill>
           <a:srgbClr val="0F1117"/>
         </a:solidFill>
+        <a:effectLst/>
       </p:bgPr>
     </p:bg>
     <p:spTree>
@@ -7335,6 +8105,13 @@
           </a:solidFill>
           <a:ln/>
         </p:spPr>
+        <p:txBody>
+          <a:bodyPr/>
+          <a:lstStyle/>
+          <a:p>
+            <a:endParaRPr lang="ko-KR" altLang="en-US"/>
+          </a:p>
+        </p:txBody>
       </p:sp>
       <p:sp>
         <p:nvSpPr>
@@ -7357,7 +8134,7 @@
           <a:bodyPr wrap="square" lIns="0" tIns="0" rIns="0" bIns="0" rtlCol="0" anchor="ctr"/>
           <a:lstStyle/>
           <a:p>
-            <a:pPr algn="l" indent="0" marL="0">
+            <a:pPr marL="0" indent="0" algn="l">
               <a:buNone/>
             </a:pPr>
             <a:r>
@@ -7396,7 +8173,7 @@
           <a:bodyPr wrap="square" lIns="0" tIns="0" rIns="0" bIns="0" rtlCol="0" anchor="ctr"/>
           <a:lstStyle/>
           <a:p>
-            <a:pPr algn="l" indent="0" marL="0">
+            <a:pPr marL="0" indent="0" algn="l">
               <a:buNone/>
             </a:pPr>
             <a:r>
@@ -7433,6 +8210,13 @@
           </a:solidFill>
           <a:ln/>
         </p:spPr>
+        <p:txBody>
+          <a:bodyPr/>
+          <a:lstStyle/>
+          <a:p>
+            <a:endParaRPr lang="ko-KR" altLang="en-US"/>
+          </a:p>
+        </p:txBody>
       </p:sp>
       <p:sp>
         <p:nvSpPr>
@@ -7453,6 +8237,13 @@
           </a:solidFill>
           <a:ln/>
         </p:spPr>
+        <p:txBody>
+          <a:bodyPr/>
+          <a:lstStyle/>
+          <a:p>
+            <a:endParaRPr lang="ko-KR" altLang="en-US"/>
+          </a:p>
+        </p:txBody>
       </p:sp>
       <p:sp>
         <p:nvSpPr>
@@ -7473,6 +8264,13 @@
           </a:solidFill>
           <a:ln/>
         </p:spPr>
+        <p:txBody>
+          <a:bodyPr/>
+          <a:lstStyle/>
+          <a:p>
+            <a:endParaRPr lang="ko-KR" altLang="en-US"/>
+          </a:p>
+        </p:txBody>
       </p:sp>
       <p:sp>
         <p:nvSpPr>
@@ -7493,6 +8291,13 @@
           </a:solidFill>
           <a:ln/>
         </p:spPr>
+        <p:txBody>
+          <a:bodyPr/>
+          <a:lstStyle/>
+          <a:p>
+            <a:endParaRPr lang="ko-KR" altLang="en-US"/>
+          </a:p>
+        </p:txBody>
       </p:sp>
       <p:sp>
         <p:nvSpPr>
@@ -7515,24 +8320,31 @@
           </a:solidFill>
           <a:ln/>
           <a:effectLst>
-            <a:outerShdw sx="100000" sy="100000" kx="0" ky="0" algn="bl" rotWithShape="0" blurRad="114300" dist="38100" dir="8100000">
+            <a:outerShdw blurRad="114300" dist="38100" dir="8100000" algn="bl" rotWithShape="0">
               <a:srgbClr val="000000">
                 <a:alpha val="35000"/>
               </a:srgbClr>
             </a:outerShdw>
           </a:effectLst>
         </p:spPr>
+        <p:txBody>
+          <a:bodyPr/>
+          <a:lstStyle/>
+          <a:p>
+            <a:endParaRPr lang="ko-KR" altLang="en-US"/>
+          </a:p>
+        </p:txBody>
       </p:sp>
       <p:pic>
         <p:nvPicPr>
-          <p:cNvPr id="10" name="Image 0" descr="shot.png">    </p:cNvPr>
+          <p:cNvPr id="10" name="Image 0" descr="shot.png"/>
           <p:cNvPicPr>
             <a:picLocks noChangeAspect="1"/>
           </p:cNvPicPr>
           <p:nvPr/>
         </p:nvPicPr>
         <p:blipFill>
-          <a:blip r:embed="rId1"/>
+          <a:blip r:embed="rId3"/>
           <a:stretch>
             <a:fillRect/>
           </a:stretch>
@@ -7568,13 +8380,20 @@
           </a:solidFill>
           <a:ln/>
           <a:effectLst>
-            <a:outerShdw sx="100000" sy="100000" kx="0" ky="0" algn="bl" rotWithShape="0" blurRad="114300" dist="38100" dir="8100000">
+            <a:outerShdw blurRad="114300" dist="38100" dir="8100000" algn="bl" rotWithShape="0">
               <a:srgbClr val="000000">
                 <a:alpha val="35000"/>
               </a:srgbClr>
             </a:outerShdw>
           </a:effectLst>
         </p:spPr>
+        <p:txBody>
+          <a:bodyPr/>
+          <a:lstStyle/>
+          <a:p>
+            <a:endParaRPr lang="ko-KR" altLang="en-US"/>
+          </a:p>
+        </p:txBody>
       </p:sp>
       <p:sp>
         <p:nvSpPr>
@@ -7597,7 +8416,7 @@
           <a:bodyPr wrap="square" lIns="0" tIns="0" rIns="0" bIns="0" rtlCol="0" anchor="ctr"/>
           <a:lstStyle/>
           <a:p>
-            <a:pPr indent="0" marL="0">
+            <a:pPr marL="0" indent="0">
               <a:buNone/>
             </a:pPr>
             <a:r>
@@ -7634,6 +8453,13 @@
           </a:solidFill>
           <a:ln/>
         </p:spPr>
+        <p:txBody>
+          <a:bodyPr/>
+          <a:lstStyle/>
+          <a:p>
+            <a:endParaRPr lang="ko-KR" altLang="en-US"/>
+          </a:p>
+        </p:txBody>
       </p:sp>
       <p:sp>
         <p:nvSpPr>
@@ -7656,7 +8482,7 @@
           <a:bodyPr wrap="square" lIns="0" tIns="0" rIns="0" bIns="0" rtlCol="0" anchor="ctr"/>
           <a:lstStyle/>
           <a:p>
-            <a:pPr algn="ctr" indent="0" marL="0">
+            <a:pPr marL="0" indent="0" algn="ctr">
               <a:buNone/>
             </a:pPr>
             <a:r>
@@ -7695,7 +8521,7 @@
           <a:bodyPr wrap="square" lIns="0" tIns="0" rIns="0" bIns="0" rtlCol="0" anchor="ctr"/>
           <a:lstStyle/>
           <a:p>
-            <a:pPr indent="0" marL="0">
+            <a:pPr marL="0" indent="0">
               <a:buNone/>
             </a:pPr>
             <a:r>
@@ -7732,6 +8558,13 @@
           </a:solidFill>
           <a:ln/>
         </p:spPr>
+        <p:txBody>
+          <a:bodyPr/>
+          <a:lstStyle/>
+          <a:p>
+            <a:endParaRPr lang="ko-KR" altLang="en-US"/>
+          </a:p>
+        </p:txBody>
       </p:sp>
       <p:sp>
         <p:nvSpPr>
@@ -7754,7 +8587,7 @@
           <a:bodyPr wrap="square" lIns="0" tIns="0" rIns="0" bIns="0" rtlCol="0" anchor="ctr"/>
           <a:lstStyle/>
           <a:p>
-            <a:pPr algn="ctr" indent="0" marL="0">
+            <a:pPr marL="0" indent="0" algn="ctr">
               <a:buNone/>
             </a:pPr>
             <a:r>
@@ -7793,7 +8626,7 @@
           <a:bodyPr wrap="square" lIns="0" tIns="0" rIns="0" bIns="0" rtlCol="0" anchor="ctr"/>
           <a:lstStyle/>
           <a:p>
-            <a:pPr indent="0" marL="0">
+            <a:pPr marL="0" indent="0">
               <a:buNone/>
             </a:pPr>
             <a:r>
@@ -7830,6 +8663,13 @@
           </a:solidFill>
           <a:ln/>
         </p:spPr>
+        <p:txBody>
+          <a:bodyPr/>
+          <a:lstStyle/>
+          <a:p>
+            <a:endParaRPr lang="ko-KR" altLang="en-US"/>
+          </a:p>
+        </p:txBody>
       </p:sp>
       <p:sp>
         <p:nvSpPr>
@@ -7852,7 +8692,7 @@
           <a:bodyPr wrap="square" lIns="0" tIns="0" rIns="0" bIns="0" rtlCol="0" anchor="ctr"/>
           <a:lstStyle/>
           <a:p>
-            <a:pPr algn="ctr" indent="0" marL="0">
+            <a:pPr marL="0" indent="0" algn="ctr">
               <a:buNone/>
             </a:pPr>
             <a:r>
@@ -7891,7 +8731,7 @@
           <a:bodyPr wrap="square" lIns="0" tIns="0" rIns="0" bIns="0" rtlCol="0" anchor="ctr"/>
           <a:lstStyle/>
           <a:p>
-            <a:pPr indent="0" marL="0">
+            <a:pPr marL="0" indent="0">
               <a:buNone/>
             </a:pPr>
             <a:r>
@@ -7928,6 +8768,13 @@
           </a:solidFill>
           <a:ln/>
         </p:spPr>
+        <p:txBody>
+          <a:bodyPr/>
+          <a:lstStyle/>
+          <a:p>
+            <a:endParaRPr lang="ko-KR" altLang="en-US"/>
+          </a:p>
+        </p:txBody>
       </p:sp>
       <p:sp>
         <p:nvSpPr>
@@ -7950,7 +8797,7 @@
           <a:bodyPr wrap="square" lIns="0" tIns="0" rIns="0" bIns="0" rtlCol="0" anchor="ctr"/>
           <a:lstStyle/>
           <a:p>
-            <a:pPr algn="ctr" indent="0" marL="0">
+            <a:pPr marL="0" indent="0" algn="ctr">
               <a:buNone/>
             </a:pPr>
             <a:r>
@@ -7989,7 +8836,7 @@
           <a:bodyPr wrap="square" lIns="0" tIns="0" rIns="0" bIns="0" rtlCol="0" anchor="ctr"/>
           <a:lstStyle/>
           <a:p>
-            <a:pPr indent="0" marL="0">
+            <a:pPr marL="0" indent="0">
               <a:buNone/>
             </a:pPr>
             <a:r>
@@ -8028,13 +8875,20 @@
           </a:solidFill>
           <a:ln/>
           <a:effectLst>
-            <a:outerShdw sx="100000" sy="100000" kx="0" ky="0" algn="bl" rotWithShape="0" blurRad="114300" dist="38100" dir="8100000">
+            <a:outerShdw blurRad="114300" dist="38100" dir="8100000" algn="bl" rotWithShape="0">
               <a:srgbClr val="000000">
                 <a:alpha val="35000"/>
               </a:srgbClr>
             </a:outerShdw>
           </a:effectLst>
         </p:spPr>
+        <p:txBody>
+          <a:bodyPr/>
+          <a:lstStyle/>
+          <a:p>
+            <a:endParaRPr lang="ko-KR" altLang="en-US"/>
+          </a:p>
+        </p:txBody>
       </p:sp>
       <p:sp>
         <p:nvSpPr>
@@ -8057,7 +8911,7 @@
           <a:bodyPr wrap="square" lIns="0" tIns="0" rIns="0" bIns="0" rtlCol="0" anchor="ctr"/>
           <a:lstStyle/>
           <a:p>
-            <a:pPr indent="0" marL="0">
+            <a:pPr marL="0" indent="0">
               <a:buNone/>
             </a:pPr>
             <a:r>
@@ -8069,11 +8923,30 @@
                 <a:ea typeface="Malgun Gothic" pitchFamily="34" charset="-122"/>
                 <a:cs typeface="Malgun Gothic" pitchFamily="34" charset="-120"/>
               </a:rPr>
-              <a:t>실행 링크   </a:t>
-            </a:r>
-            <a:pPr indent="0" marL="0">
-              <a:buNone/>
-            </a:pPr>
+              <a:t>실행 </a:t>
+            </a:r>
+            <a:r>
+              <a:rPr lang="en-US" sz="1400" b="1" dirty="0" err="1">
+                <a:solidFill>
+                  <a:srgbClr val="4EC1FF"/>
+                </a:solidFill>
+                <a:latin typeface="Malgun Gothic" pitchFamily="34" charset="0"/>
+                <a:ea typeface="Malgun Gothic" pitchFamily="34" charset="-122"/>
+                <a:cs typeface="Malgun Gothic" pitchFamily="34" charset="-120"/>
+              </a:rPr>
+              <a:t>링크</a:t>
+            </a:r>
+            <a:r>
+              <a:rPr lang="en-US" sz="1400" b="1" dirty="0">
+                <a:solidFill>
+                  <a:srgbClr val="4EC1FF"/>
+                </a:solidFill>
+                <a:latin typeface="Malgun Gothic" pitchFamily="34" charset="0"/>
+                <a:ea typeface="Malgun Gothic" pitchFamily="34" charset="-122"/>
+                <a:cs typeface="Malgun Gothic" pitchFamily="34" charset="-120"/>
+              </a:rPr>
+              <a:t>   </a:t>
+            </a:r>
             <a:r>
               <a:rPr lang="en-US" sz="1500" dirty="0">
                 <a:solidFill>
@@ -8082,8 +8955,9 @@
                 <a:latin typeface="Consolas" pitchFamily="34" charset="0"/>
                 <a:ea typeface="Consolas" pitchFamily="34" charset="-122"/>
                 <a:cs typeface="Consolas" pitchFamily="34" charset="-120"/>
-              </a:rPr>
-              <a:t>https://(GitHub Pages 주소 입력)</a:t>
+                <a:hlinkClick r:id="rId4"/>
+              </a:rPr>
+              <a:t>https://giljoo93.github.io/TETRIS</a:t>
             </a:r>
             <a:endParaRPr lang="en-US" sz="1400" dirty="0"/>
           </a:p>
@@ -8105,6 +8979,7 @@
         <a:solidFill>
           <a:srgbClr val="0F1117"/>
         </a:solidFill>
+        <a:effectLst/>
       </p:bgPr>
     </p:bg>
     <p:spTree>
@@ -8140,6 +9015,13 @@
           </a:solidFill>
           <a:ln/>
         </p:spPr>
+        <p:txBody>
+          <a:bodyPr/>
+          <a:lstStyle/>
+          <a:p>
+            <a:endParaRPr lang="ko-KR" altLang="en-US"/>
+          </a:p>
+        </p:txBody>
       </p:sp>
       <p:sp>
         <p:nvSpPr>
@@ -8162,7 +9044,7 @@
           <a:bodyPr wrap="square" lIns="0" tIns="0" rIns="0" bIns="0" rtlCol="0" anchor="ctr"/>
           <a:lstStyle/>
           <a:p>
-            <a:pPr algn="l" indent="0" marL="0">
+            <a:pPr marL="0" indent="0" algn="l">
               <a:buNone/>
             </a:pPr>
             <a:r>
@@ -8201,7 +9083,7 @@
           <a:bodyPr wrap="square" lIns="0" tIns="0" rIns="0" bIns="0" rtlCol="0" anchor="ctr"/>
           <a:lstStyle/>
           <a:p>
-            <a:pPr algn="l" indent="0" marL="0">
+            <a:pPr marL="0" indent="0" algn="l">
               <a:buNone/>
             </a:pPr>
             <a:r>
@@ -8238,6 +9120,13 @@
           </a:solidFill>
           <a:ln/>
         </p:spPr>
+        <p:txBody>
+          <a:bodyPr/>
+          <a:lstStyle/>
+          <a:p>
+            <a:endParaRPr lang="ko-KR" altLang="en-US"/>
+          </a:p>
+        </p:txBody>
       </p:sp>
       <p:sp>
         <p:nvSpPr>
@@ -8258,6 +9147,13 @@
           </a:solidFill>
           <a:ln/>
         </p:spPr>
+        <p:txBody>
+          <a:bodyPr/>
+          <a:lstStyle/>
+          <a:p>
+            <a:endParaRPr lang="ko-KR" altLang="en-US"/>
+          </a:p>
+        </p:txBody>
       </p:sp>
       <p:sp>
         <p:nvSpPr>
@@ -8278,6 +9174,13 @@
           </a:solidFill>
           <a:ln/>
         </p:spPr>
+        <p:txBody>
+          <a:bodyPr/>
+          <a:lstStyle/>
+          <a:p>
+            <a:endParaRPr lang="ko-KR" altLang="en-US"/>
+          </a:p>
+        </p:txBody>
       </p:sp>
       <p:sp>
         <p:nvSpPr>
@@ -8298,6 +9201,13 @@
           </a:solidFill>
           <a:ln/>
         </p:spPr>
+        <p:txBody>
+          <a:bodyPr/>
+          <a:lstStyle/>
+          <a:p>
+            <a:endParaRPr lang="ko-KR" altLang="en-US"/>
+          </a:p>
+        </p:txBody>
       </p:sp>
       <p:sp>
         <p:nvSpPr>
@@ -8320,13 +9230,20 @@
           </a:solidFill>
           <a:ln/>
           <a:effectLst>
-            <a:outerShdw sx="100000" sy="100000" kx="0" ky="0" algn="bl" rotWithShape="0" blurRad="114300" dist="38100" dir="8100000">
+            <a:outerShdw blurRad="114300" dist="38100" dir="8100000" algn="bl" rotWithShape="0">
               <a:srgbClr val="000000">
                 <a:alpha val="35000"/>
               </a:srgbClr>
             </a:outerShdw>
           </a:effectLst>
         </p:spPr>
+        <p:txBody>
+          <a:bodyPr/>
+          <a:lstStyle/>
+          <a:p>
+            <a:endParaRPr lang="ko-KR" altLang="en-US"/>
+          </a:p>
+        </p:txBody>
       </p:sp>
       <p:sp>
         <p:nvSpPr>
@@ -8347,6 +9264,13 @@
           </a:solidFill>
           <a:ln/>
         </p:spPr>
+        <p:txBody>
+          <a:bodyPr/>
+          <a:lstStyle/>
+          <a:p>
+            <a:endParaRPr lang="ko-KR" altLang="en-US"/>
+          </a:p>
+        </p:txBody>
       </p:sp>
       <p:sp>
         <p:nvSpPr>
@@ -8369,7 +9293,7 @@
           <a:bodyPr wrap="square" lIns="0" tIns="0" rIns="0" bIns="0" rtlCol="0" anchor="ctr"/>
           <a:lstStyle/>
           <a:p>
-            <a:pPr indent="0" marL="0">
+            <a:pPr marL="0" indent="0">
               <a:buNone/>
             </a:pPr>
             <a:r>
@@ -8408,7 +9332,7 @@
           <a:bodyPr wrap="square" lIns="0" tIns="0" rIns="0" bIns="0" rtlCol="0" anchor="t"/>
           <a:lstStyle/>
           <a:p>
-            <a:pPr indent="0" marL="0">
+            <a:pPr marL="0" indent="0">
               <a:buNone/>
             </a:pPr>
             <a:r>
@@ -8447,7 +9371,7 @@
           <a:bodyPr wrap="square" lIns="0" tIns="0" rIns="0" bIns="0" rtlCol="0" anchor="ctr"/>
           <a:lstStyle/>
           <a:p>
-            <a:pPr algn="ctr" indent="0" marL="0">
+            <a:pPr marL="0" indent="0" algn="ctr">
               <a:buNone/>
             </a:pPr>
             <a:r>
@@ -8486,7 +9410,7 @@
           <a:bodyPr wrap="square" lIns="0" tIns="0" rIns="0" bIns="0" rtlCol="0" anchor="ctr"/>
           <a:lstStyle/>
           <a:p>
-            <a:pPr indent="0" marL="0">
+            <a:pPr marL="0" indent="0">
               <a:buNone/>
             </a:pPr>
             <a:r>
@@ -8525,7 +9449,7 @@
           <a:bodyPr wrap="square" lIns="0" tIns="0" rIns="0" bIns="0" rtlCol="0" anchor="t"/>
           <a:lstStyle/>
           <a:p>
-            <a:pPr indent="0" marL="0">
+            <a:pPr marL="0" indent="0">
               <a:buNone/>
             </a:pPr>
             <a:r>
@@ -8564,7 +9488,7 @@
           <a:bodyPr wrap="square" lIns="0" tIns="0" rIns="0" bIns="0" rtlCol="0" anchor="ctr"/>
           <a:lstStyle/>
           <a:p>
-            <a:pPr algn="r" indent="0" marL="0">
+            <a:pPr marL="0" indent="0" algn="r">
               <a:buNone/>
             </a:pPr>
             <a:r>
@@ -8603,13 +9527,20 @@
           </a:solidFill>
           <a:ln/>
           <a:effectLst>
-            <a:outerShdw sx="100000" sy="100000" kx="0" ky="0" algn="bl" rotWithShape="0" blurRad="114300" dist="38100" dir="8100000">
+            <a:outerShdw blurRad="114300" dist="38100" dir="8100000" algn="bl" rotWithShape="0">
               <a:srgbClr val="000000">
                 <a:alpha val="35000"/>
               </a:srgbClr>
             </a:outerShdw>
           </a:effectLst>
         </p:spPr>
+        <p:txBody>
+          <a:bodyPr/>
+          <a:lstStyle/>
+          <a:p>
+            <a:endParaRPr lang="ko-KR" altLang="en-US"/>
+          </a:p>
+        </p:txBody>
       </p:sp>
       <p:sp>
         <p:nvSpPr>
@@ -8630,6 +9561,13 @@
           </a:solidFill>
           <a:ln/>
         </p:spPr>
+        <p:txBody>
+          <a:bodyPr/>
+          <a:lstStyle/>
+          <a:p>
+            <a:endParaRPr lang="ko-KR" altLang="en-US"/>
+          </a:p>
+        </p:txBody>
       </p:sp>
       <p:sp>
         <p:nvSpPr>
@@ -8652,7 +9590,7 @@
           <a:bodyPr wrap="square" lIns="0" tIns="0" rIns="0" bIns="0" rtlCol="0" anchor="ctr"/>
           <a:lstStyle/>
           <a:p>
-            <a:pPr indent="0" marL="0">
+            <a:pPr marL="0" indent="0">
               <a:buNone/>
             </a:pPr>
             <a:r>
@@ -8691,7 +9629,7 @@
           <a:bodyPr wrap="square" lIns="0" tIns="0" rIns="0" bIns="0" rtlCol="0" anchor="t"/>
           <a:lstStyle/>
           <a:p>
-            <a:pPr indent="0" marL="0">
+            <a:pPr marL="0" indent="0">
               <a:buNone/>
             </a:pPr>
             <a:r>
@@ -8730,7 +9668,7 @@
           <a:bodyPr wrap="square" lIns="0" tIns="0" rIns="0" bIns="0" rtlCol="0" anchor="ctr"/>
           <a:lstStyle/>
           <a:p>
-            <a:pPr algn="ctr" indent="0" marL="0">
+            <a:pPr marL="0" indent="0" algn="ctr">
               <a:buNone/>
             </a:pPr>
             <a:r>
@@ -8769,7 +9707,7 @@
           <a:bodyPr wrap="square" lIns="0" tIns="0" rIns="0" bIns="0" rtlCol="0" anchor="ctr"/>
           <a:lstStyle/>
           <a:p>
-            <a:pPr indent="0" marL="0">
+            <a:pPr marL="0" indent="0">
               <a:buNone/>
             </a:pPr>
             <a:r>
@@ -8808,7 +9746,7 @@
           <a:bodyPr wrap="square" lIns="0" tIns="0" rIns="0" bIns="0" rtlCol="0" anchor="t"/>
           <a:lstStyle/>
           <a:p>
-            <a:pPr indent="0" marL="0">
+            <a:pPr marL="0" indent="0">
               <a:buNone/>
             </a:pPr>
             <a:r>
@@ -8847,7 +9785,7 @@
           <a:bodyPr wrap="square" lIns="0" tIns="0" rIns="0" bIns="0" rtlCol="0" anchor="ctr"/>
           <a:lstStyle/>
           <a:p>
-            <a:pPr algn="r" indent="0" marL="0">
+            <a:pPr marL="0" indent="0" algn="r">
               <a:buNone/>
             </a:pPr>
             <a:r>
@@ -8886,13 +9824,20 @@
           </a:solidFill>
           <a:ln/>
           <a:effectLst>
-            <a:outerShdw sx="100000" sy="100000" kx="0" ky="0" algn="bl" rotWithShape="0" blurRad="114300" dist="38100" dir="8100000">
+            <a:outerShdw blurRad="114300" dist="38100" dir="8100000" algn="bl" rotWithShape="0">
               <a:srgbClr val="000000">
                 <a:alpha val="35000"/>
               </a:srgbClr>
             </a:outerShdw>
           </a:effectLst>
         </p:spPr>
+        <p:txBody>
+          <a:bodyPr/>
+          <a:lstStyle/>
+          <a:p>
+            <a:endParaRPr lang="ko-KR" altLang="en-US"/>
+          </a:p>
+        </p:txBody>
       </p:sp>
       <p:sp>
         <p:nvSpPr>
@@ -8913,6 +9858,13 @@
           </a:solidFill>
           <a:ln/>
         </p:spPr>
+        <p:txBody>
+          <a:bodyPr/>
+          <a:lstStyle/>
+          <a:p>
+            <a:endParaRPr lang="ko-KR" altLang="en-US"/>
+          </a:p>
+        </p:txBody>
       </p:sp>
       <p:sp>
         <p:nvSpPr>
@@ -8935,7 +9887,7 @@
           <a:bodyPr wrap="square" lIns="0" tIns="0" rIns="0" bIns="0" rtlCol="0" anchor="ctr"/>
           <a:lstStyle/>
           <a:p>
-            <a:pPr indent="0" marL="0">
+            <a:pPr marL="0" indent="0">
               <a:buNone/>
             </a:pPr>
             <a:r>
@@ -8974,7 +9926,7 @@
           <a:bodyPr wrap="square" lIns="0" tIns="0" rIns="0" bIns="0" rtlCol="0" anchor="t"/>
           <a:lstStyle/>
           <a:p>
-            <a:pPr indent="0" marL="0">
+            <a:pPr marL="0" indent="0">
               <a:buNone/>
             </a:pPr>
             <a:r>
@@ -9013,7 +9965,7 @@
           <a:bodyPr wrap="square" lIns="0" tIns="0" rIns="0" bIns="0" rtlCol="0" anchor="ctr"/>
           <a:lstStyle/>
           <a:p>
-            <a:pPr algn="ctr" indent="0" marL="0">
+            <a:pPr marL="0" indent="0" algn="ctr">
               <a:buNone/>
             </a:pPr>
             <a:r>
@@ -9052,7 +10004,7 @@
           <a:bodyPr wrap="square" lIns="0" tIns="0" rIns="0" bIns="0" rtlCol="0" anchor="ctr"/>
           <a:lstStyle/>
           <a:p>
-            <a:pPr indent="0" marL="0">
+            <a:pPr marL="0" indent="0">
               <a:buNone/>
             </a:pPr>
             <a:r>
@@ -9091,7 +10043,7 @@
           <a:bodyPr wrap="square" lIns="0" tIns="0" rIns="0" bIns="0" rtlCol="0" anchor="t"/>
           <a:lstStyle/>
           <a:p>
-            <a:pPr indent="0" marL="0">
+            <a:pPr marL="0" indent="0">
               <a:buNone/>
             </a:pPr>
             <a:r>
@@ -9130,7 +10082,7 @@
           <a:bodyPr wrap="square" lIns="0" tIns="0" rIns="0" bIns="0" rtlCol="0" anchor="ctr"/>
           <a:lstStyle/>
           <a:p>
-            <a:pPr algn="r" indent="0" marL="0">
+            <a:pPr marL="0" indent="0" algn="r">
               <a:buNone/>
             </a:pPr>
             <a:r>
@@ -9169,7 +10121,7 @@
           <a:bodyPr wrap="square" lIns="0" tIns="0" rIns="0" bIns="0" rtlCol="0" anchor="ctr"/>
           <a:lstStyle/>
           <a:p>
-            <a:pPr algn="ctr" indent="0" marL="0">
+            <a:pPr marL="0" indent="0" algn="ctr">
               <a:buNone/>
             </a:pPr>
             <a:r>
@@ -9196,13 +10148,14 @@
 </file>
 
 <file path=ppt/slides/slide9.xml><?xml version="1.0" encoding="utf-8"?>
-<p:sld xmlns:r="http://schemas.openxmlformats.org/officeDocument/2006/relationships" xmlns:c="http://schemas.openxmlformats.org/drawingml/2006/chart" xmlns:a="http://schemas.openxmlformats.org/drawingml/2006/main" xmlns:dgm="http://schemas.openxmlformats.org/drawingml/2006/diagram" xmlns:dsp="http://schemas.microsoft.com/office/drawing/2008/diagram" xmlns:p="http://schemas.openxmlformats.org/presentationml/2006/main">
+<p:sld xmlns:a="http://schemas.openxmlformats.org/drawingml/2006/main" xmlns:r="http://schemas.openxmlformats.org/officeDocument/2006/relationships" xmlns:p="http://schemas.openxmlformats.org/presentationml/2006/main">
   <p:cSld name="Slide 9">
     <p:bg>
-      <p:bgPr shadeToTitle="0">
+      <p:bgPr>
         <a:solidFill>
-          <a:srgbClr val="0f1117"/>
+          <a:srgbClr val="0F1117"/>
         </a:solidFill>
+        <a:effectLst/>
       </p:bgPr>
     </p:bg>
     <p:spTree>
@@ -9234,12 +10187,13 @@
             <a:avLst/>
           </a:prstGeom>
           <a:solidFill>
-            <a:srgbClr val="4ec1ff"/>
+            <a:srgbClr val="4EC1FF"/>
           </a:solidFill>
           <a:ln/>
         </p:spPr>
         <p:txBody>
           <a:bodyPr anchor="ctr"/>
+          <a:lstStyle/>
           <a:p>
             <a:pPr algn="ctr">
               <a:defRPr/>
@@ -9276,7 +10230,7 @@
             <a:r>
               <a:rPr lang="en-US" sz="3000" b="1">
                 <a:solidFill>
-                  <a:srgbClr val="232a3b"/>
+                  <a:srgbClr val="232A3B"/>
                 </a:solidFill>
                 <a:latin typeface="Arial Black"/>
                 <a:ea typeface="Arial Black"/>
@@ -9316,7 +10270,7 @@
             <a:r>
               <a:rPr lang="en-US" sz="2800" b="1">
                 <a:solidFill>
-                  <a:srgbClr val="e8ebf2"/>
+                  <a:srgbClr val="E8EBF2"/>
                 </a:solidFill>
                 <a:latin typeface="맑은 고딕"/>
                 <a:ea typeface="맑은 고딕"/>
@@ -9343,12 +10297,13 @@
             <a:avLst/>
           </a:prstGeom>
           <a:solidFill>
-            <a:srgbClr val="4ec1ff"/>
+            <a:srgbClr val="4EC1FF"/>
           </a:solidFill>
           <a:ln/>
         </p:spPr>
         <p:txBody>
           <a:bodyPr anchor="ctr"/>
+          <a:lstStyle/>
           <a:p>
             <a:pPr algn="ctr">
               <a:defRPr/>
@@ -9372,12 +10327,13 @@
             <a:avLst/>
           </a:prstGeom>
           <a:solidFill>
-            <a:srgbClr val="4ec1ff"/>
+            <a:srgbClr val="4EC1FF"/>
           </a:solidFill>
           <a:ln/>
         </p:spPr>
         <p:txBody>
           <a:bodyPr anchor="ctr"/>
+          <a:lstStyle/>
           <a:p>
             <a:pPr algn="ctr">
               <a:defRPr/>
@@ -9401,12 +10357,13 @@
             <a:avLst/>
           </a:prstGeom>
           <a:solidFill>
-            <a:srgbClr val="4ec1ff"/>
+            <a:srgbClr val="4EC1FF"/>
           </a:solidFill>
           <a:ln/>
         </p:spPr>
         <p:txBody>
           <a:bodyPr anchor="ctr"/>
+          <a:lstStyle/>
           <a:p>
             <a:pPr algn="ctr">
               <a:defRPr/>
@@ -9430,12 +10387,13 @@
             <a:avLst/>
           </a:prstGeom>
           <a:solidFill>
-            <a:srgbClr val="4ec1ff"/>
+            <a:srgbClr val="4EC1FF"/>
           </a:solidFill>
           <a:ln/>
         </p:spPr>
         <p:txBody>
           <a:bodyPr anchor="ctr"/>
+          <a:lstStyle/>
           <a:p>
             <a:pPr algn="ctr">
               <a:defRPr/>
@@ -9461,7 +10419,7 @@
             </a:avLst>
           </a:prstGeom>
           <a:solidFill>
-            <a:srgbClr val="1a1f2b"/>
+            <a:srgbClr val="1A1F2B"/>
           </a:solidFill>
           <a:ln/>
           <a:effectLst>
@@ -9474,6 +10432,7 @@
         </p:spPr>
         <p:txBody>
           <a:bodyPr anchor="ctr"/>
+          <a:lstStyle/>
           <a:p>
             <a:pPr algn="ctr">
               <a:defRPr/>
@@ -9497,12 +10456,13 @@
             <a:avLst/>
           </a:prstGeom>
           <a:solidFill>
-            <a:srgbClr val="00cc00"/>
+            <a:srgbClr val="00CC00"/>
           </a:solidFill>
           <a:ln/>
         </p:spPr>
         <p:txBody>
           <a:bodyPr anchor="ctr"/>
+          <a:lstStyle/>
           <a:p>
             <a:pPr algn="ctr">
               <a:defRPr/>
@@ -9539,7 +10499,7 @@
             <a:r>
               <a:rPr lang="en-US" sz="1900" b="1">
                 <a:solidFill>
-                  <a:srgbClr val="e8ebf2"/>
+                  <a:srgbClr val="E8EBF2"/>
                 </a:solidFill>
                 <a:latin typeface="맑은 고딕"/>
                 <a:ea typeface="맑은 고딕"/>
@@ -9584,19 +10544,52 @@
               <a:defRPr/>
             </a:pPr>
             <a:r>
-              <a:rPr lang="en-US" sz="1400">
-                <a:solidFill>
-                  <a:srgbClr val="e8ebf2"/>
+              <a:rPr lang="en-US" sz="1400" dirty="0">
+                <a:solidFill>
+                  <a:srgbClr val="E8EBF2"/>
                 </a:solidFill>
                 <a:latin typeface="맑은 고딕"/>
                 <a:ea typeface="맑은 고딕"/>
                 <a:cs typeface="맑은 고딕"/>
               </a:rPr>
-              <a:t>2D 배열·좌표 계산으로</a:t>
-            </a:r>
-            <a:endParaRPr lang="en-US" sz="1400">
+              <a:t>2D </a:t>
+            </a:r>
+            <a:r>
+              <a:rPr lang="en-US" sz="1400" dirty="0" err="1">
+                <a:solidFill>
+                  <a:srgbClr val="E8EBF2"/>
+                </a:solidFill>
+                <a:latin typeface="맑은 고딕"/>
+                <a:ea typeface="맑은 고딕"/>
+                <a:cs typeface="맑은 고딕"/>
+              </a:rPr>
+              <a:t>배열·좌표</a:t>
+            </a:r>
+            <a:r>
+              <a:rPr lang="en-US" sz="1400" dirty="0">
+                <a:solidFill>
+                  <a:srgbClr val="E8EBF2"/>
+                </a:solidFill>
+                <a:latin typeface="맑은 고딕"/>
+                <a:ea typeface="맑은 고딕"/>
+                <a:cs typeface="맑은 고딕"/>
+              </a:rPr>
+              <a:t> </a:t>
+            </a:r>
+            <a:r>
+              <a:rPr lang="en-US" sz="1400" dirty="0" err="1">
+                <a:solidFill>
+                  <a:srgbClr val="E8EBF2"/>
+                </a:solidFill>
+                <a:latin typeface="맑은 고딕"/>
+                <a:ea typeface="맑은 고딕"/>
+                <a:cs typeface="맑은 고딕"/>
+              </a:rPr>
+              <a:t>계산으로</a:t>
+            </a:r>
+            <a:endParaRPr lang="en-US" sz="1400" dirty="0">
               <a:solidFill>
-                <a:srgbClr val="e8ebf2"/>
+                <a:srgbClr val="E8EBF2"/>
               </a:solidFill>
               <a:latin typeface="맑은 고딕"/>
               <a:ea typeface="맑은 고딕"/>
@@ -9616,19 +10609,85 @@
               <a:defRPr/>
             </a:pPr>
             <a:r>
-              <a:rPr lang="en-US" sz="1400">
-                <a:solidFill>
-                  <a:srgbClr val="e8ebf2"/>
+              <a:rPr lang="en-US" sz="1400" dirty="0" err="1">
+                <a:solidFill>
+                  <a:srgbClr val="E8EBF2"/>
                 </a:solidFill>
                 <a:latin typeface="맑은 고딕"/>
                 <a:ea typeface="맑은 고딕"/>
                 <a:cs typeface="맑은 고딕"/>
               </a:rPr>
-              <a:t>게임 로직을 직접 설계</a:t>
-            </a:r>
-            <a:endParaRPr lang="en-US" sz="1400">
+              <a:t>게임</a:t>
+            </a:r>
+            <a:r>
+              <a:rPr lang="en-US" sz="1400" dirty="0">
+                <a:solidFill>
+                  <a:srgbClr val="E8EBF2"/>
+                </a:solidFill>
+                <a:latin typeface="맑은 고딕"/>
+                <a:ea typeface="맑은 고딕"/>
+                <a:cs typeface="맑은 고딕"/>
+              </a:rPr>
+              <a:t> </a:t>
+            </a:r>
+            <a:r>
+              <a:rPr lang="en-US" sz="1400" dirty="0" err="1">
+                <a:solidFill>
+                  <a:srgbClr val="E8EBF2"/>
+                </a:solidFill>
+                <a:latin typeface="맑은 고딕"/>
+                <a:ea typeface="맑은 고딕"/>
+                <a:cs typeface="맑은 고딕"/>
+              </a:rPr>
+              <a:t>로직을</a:t>
+            </a:r>
+            <a:r>
+              <a:rPr lang="en-US" sz="1400" dirty="0">
+                <a:solidFill>
+                  <a:srgbClr val="E8EBF2"/>
+                </a:solidFill>
+                <a:latin typeface="맑은 고딕"/>
+                <a:ea typeface="맑은 고딕"/>
+                <a:cs typeface="맑은 고딕"/>
+              </a:rPr>
+              <a:t> </a:t>
+            </a:r>
+            <a:r>
+              <a:rPr lang="en-US" sz="1400" dirty="0" err="1">
+                <a:solidFill>
+                  <a:srgbClr val="E8EBF2"/>
+                </a:solidFill>
+                <a:latin typeface="맑은 고딕"/>
+                <a:ea typeface="맑은 고딕"/>
+                <a:cs typeface="맑은 고딕"/>
+              </a:rPr>
+              <a:t>직접</a:t>
+            </a:r>
+            <a:r>
+              <a:rPr lang="en-US" sz="1400" dirty="0">
+                <a:solidFill>
+                  <a:srgbClr val="E8EBF2"/>
+                </a:solidFill>
+                <a:latin typeface="맑은 고딕"/>
+                <a:ea typeface="맑은 고딕"/>
+                <a:cs typeface="맑은 고딕"/>
+              </a:rPr>
+              <a:t> </a:t>
+            </a:r>
+            <a:r>
+              <a:rPr lang="en-US" sz="1400" dirty="0" err="1">
+                <a:solidFill>
+                  <a:srgbClr val="E8EBF2"/>
+                </a:solidFill>
+                <a:latin typeface="맑은 고딕"/>
+                <a:ea typeface="맑은 고딕"/>
+                <a:cs typeface="맑은 고딕"/>
+              </a:rPr>
+              <a:t>설계</a:t>
+            </a:r>
+            <a:endParaRPr lang="en-US" sz="1400" dirty="0">
               <a:solidFill>
-                <a:srgbClr val="e8ebf2"/>
+                <a:srgbClr val="E8EBF2"/>
               </a:solidFill>
               <a:latin typeface="맑은 고딕"/>
               <a:ea typeface="맑은 고딕"/>
@@ -9648,19 +10707,63 @@
               <a:defRPr/>
             </a:pPr>
             <a:r>
-              <a:rPr lang="en-US" sz="1400">
-                <a:solidFill>
-                  <a:srgbClr val="e8ebf2"/>
+              <a:rPr lang="en-US" sz="1400" dirty="0" err="1">
+                <a:solidFill>
+                  <a:srgbClr val="E8EBF2"/>
                 </a:solidFill>
                 <a:latin typeface="맑은 고딕"/>
                 <a:ea typeface="맑은 고딕"/>
                 <a:cs typeface="맑은 고딕"/>
               </a:rPr>
-              <a:t>Canvas와 게임 루프</a:t>
-            </a:r>
-            <a:endParaRPr lang="en-US" sz="1400">
+              <a:t>Canvas와</a:t>
+            </a:r>
+            <a:r>
+              <a:rPr lang="en-US" sz="1400" dirty="0">
+                <a:solidFill>
+                  <a:srgbClr val="E8EBF2"/>
+                </a:solidFill>
+                <a:latin typeface="맑은 고딕"/>
+                <a:ea typeface="맑은 고딕"/>
+                <a:cs typeface="맑은 고딕"/>
+              </a:rPr>
+              <a:t> </a:t>
+            </a:r>
+            <a:r>
+              <a:rPr lang="en-US" sz="1400" dirty="0" err="1">
+                <a:solidFill>
+                  <a:srgbClr val="E8EBF2"/>
+                </a:solidFill>
+                <a:latin typeface="맑은 고딕"/>
+                <a:ea typeface="맑은 고딕"/>
+                <a:cs typeface="맑은 고딕"/>
+              </a:rPr>
+              <a:t>게임</a:t>
+            </a:r>
+            <a:r>
+              <a:rPr lang="en-US" sz="1400" dirty="0">
+                <a:solidFill>
+                  <a:srgbClr val="E8EBF2"/>
+                </a:solidFill>
+                <a:latin typeface="맑은 고딕"/>
+                <a:ea typeface="맑은 고딕"/>
+                <a:cs typeface="맑은 고딕"/>
+              </a:rPr>
+              <a:t> </a:t>
+            </a:r>
+            <a:r>
+              <a:rPr lang="en-US" sz="1400" dirty="0" err="1">
+                <a:solidFill>
+                  <a:srgbClr val="E8EBF2"/>
+                </a:solidFill>
+                <a:latin typeface="맑은 고딕"/>
+                <a:ea typeface="맑은 고딕"/>
+                <a:cs typeface="맑은 고딕"/>
+              </a:rPr>
+              <a:t>루프</a:t>
+            </a:r>
+            <a:endParaRPr lang="en-US" sz="1400" dirty="0">
               <a:solidFill>
-                <a:srgbClr val="e8ebf2"/>
+                <a:srgbClr val="E8EBF2"/>
               </a:solidFill>
               <a:latin typeface="맑은 고딕"/>
               <a:ea typeface="맑은 고딕"/>
@@ -9680,84 +10783,63 @@
               <a:defRPr/>
             </a:pPr>
             <a:r>
-              <a:rPr lang="en-US" sz="1400">
-                <a:solidFill>
-                  <a:srgbClr val="e8ebf2"/>
+              <a:rPr lang="en-US" sz="1400" dirty="0" err="1">
+                <a:solidFill>
+                  <a:srgbClr val="E8EBF2"/>
                 </a:solidFill>
                 <a:latin typeface="맑은 고딕"/>
                 <a:ea typeface="맑은 고딕"/>
                 <a:cs typeface="맑은 고딕"/>
               </a:rPr>
-              <a:t>rAF 동작 원리 이해</a:t>
-            </a:r>
-            <a:br>
-              <a:rPr lang="ko-KR" altLang="en-US" sz="1400">
-                <a:solidFill>
-                  <a:srgbClr val="e8ebf2"/>
+              <a:t>rAF</a:t>
+            </a:r>
+            <a:r>
+              <a:rPr lang="en-US" sz="1400" dirty="0">
+                <a:solidFill>
+                  <a:srgbClr val="E8EBF2"/>
                 </a:solidFill>
                 <a:latin typeface="맑은 고딕"/>
                 <a:ea typeface="맑은 고딕"/>
                 <a:cs typeface="맑은 고딕"/>
               </a:rPr>
-            </a:br>
-            <a:r>
-              <a:rPr lang="en-US" altLang="ko-KR" sz="1400">
-                <a:solidFill>
-                  <a:srgbClr val="e8ebf2"/>
+              <a:t> </a:t>
+            </a:r>
+            <a:r>
+              <a:rPr lang="en-US" sz="1400" dirty="0" err="1">
+                <a:solidFill>
+                  <a:srgbClr val="E8EBF2"/>
                 </a:solidFill>
                 <a:latin typeface="맑은 고딕"/>
                 <a:ea typeface="맑은 고딕"/>
                 <a:cs typeface="맑은 고딕"/>
               </a:rPr>
-              <a:t>(</a:t>
-            </a:r>
-            <a:r>
-              <a:rPr lang="ko-KR" altLang="en-US" sz="1400">
-                <a:solidFill>
-                  <a:srgbClr val="e8ebf2"/>
+              <a:t>동작</a:t>
+            </a:r>
+            <a:r>
+              <a:rPr lang="en-US" sz="1400" dirty="0">
+                <a:solidFill>
+                  <a:srgbClr val="E8EBF2"/>
                 </a:solidFill>
                 <a:latin typeface="맑은 고딕"/>
                 <a:ea typeface="맑은 고딕"/>
                 <a:cs typeface="맑은 고딕"/>
               </a:rPr>
-              <a:t>화면 갱신 </a:t>
-            </a:r>
-            <a:r>
-              <a:rPr lang="en-US" altLang="ko-KR" sz="1400">
-                <a:solidFill>
-                  <a:srgbClr val="e8ebf2"/>
+              <a:t> </a:t>
+            </a:r>
+            <a:r>
+              <a:rPr lang="en-US" sz="1400" dirty="0" err="1">
+                <a:solidFill>
+                  <a:srgbClr val="E8EBF2"/>
                 </a:solidFill>
                 <a:latin typeface="맑은 고딕"/>
                 <a:ea typeface="맑은 고딕"/>
                 <a:cs typeface="맑은 고딕"/>
               </a:rPr>
-              <a:t>:</a:t>
-            </a:r>
-            <a:r>
-              <a:rPr lang="ko-KR" altLang="en-US" sz="1400">
-                <a:solidFill>
-                  <a:srgbClr val="e8ebf2"/>
-                </a:solidFill>
-                <a:latin typeface="맑은 고딕"/>
-                <a:ea typeface="맑은 고딕"/>
-                <a:cs typeface="맑은 고딕"/>
-              </a:rPr>
-              <a:t> 렌더링 루프</a:t>
-            </a:r>
-            <a:r>
-              <a:rPr lang="en-US" altLang="ko-KR" sz="1400">
-                <a:solidFill>
-                  <a:srgbClr val="e8ebf2"/>
-                </a:solidFill>
-                <a:latin typeface="맑은 고딕"/>
-                <a:ea typeface="맑은 고딕"/>
-                <a:cs typeface="맑은 고딕"/>
-              </a:rPr>
-              <a:t>)</a:t>
-            </a:r>
-            <a:endParaRPr lang="en-US" altLang="ko-KR" sz="1400">
+              <a:t>원리</a:t>
+            </a:r>
+            <a:endParaRPr lang="en-US" altLang="ko-KR" sz="1400" dirty="0">
               <a:solidFill>
-                <a:srgbClr val="e8ebf2"/>
+                <a:srgbClr val="E8EBF2"/>
               </a:solidFill>
               <a:latin typeface="맑은 고딕"/>
               <a:ea typeface="맑은 고딕"/>
@@ -9783,7 +10865,7 @@
             </a:avLst>
           </a:prstGeom>
           <a:solidFill>
-            <a:srgbClr val="1a1f2b"/>
+            <a:srgbClr val="1A1F2B"/>
           </a:solidFill>
           <a:ln/>
           <a:effectLst>
@@ -9796,6 +10878,7 @@
         </p:spPr>
         <p:txBody>
           <a:bodyPr anchor="ctr"/>
+          <a:lstStyle/>
           <a:p>
             <a:pPr algn="ctr">
               <a:defRPr/>
@@ -9819,12 +10902,13 @@
             <a:avLst/>
           </a:prstGeom>
           <a:solidFill>
-            <a:srgbClr val="f05800"/>
+            <a:srgbClr val="F05800"/>
           </a:solidFill>
           <a:ln/>
         </p:spPr>
         <p:txBody>
           <a:bodyPr anchor="ctr"/>
+          <a:lstStyle/>
           <a:p>
             <a:pPr algn="ctr">
               <a:defRPr/>
@@ -9861,7 +10945,7 @@
             <a:r>
               <a:rPr lang="en-US" sz="1900" b="1">
                 <a:solidFill>
-                  <a:srgbClr val="e8ebf2"/>
+                  <a:srgbClr val="E8EBF2"/>
                 </a:solidFill>
                 <a:latin typeface="맑은 고딕"/>
                 <a:ea typeface="맑은 고딕"/>
@@ -9906,19 +10990,63 @@
               <a:defRPr/>
             </a:pPr>
             <a:r>
-              <a:rPr lang="en-US" sz="1400">
-                <a:solidFill>
-                  <a:srgbClr val="e8ebf2"/>
+              <a:rPr lang="en-US" sz="1400" dirty="0" err="1">
+                <a:solidFill>
+                  <a:srgbClr val="E8EBF2"/>
                 </a:solidFill>
                 <a:latin typeface="맑은 고딕"/>
                 <a:ea typeface="맑은 고딕"/>
                 <a:cs typeface="맑은 고딕"/>
               </a:rPr>
-              <a:t>회전 시 충돌 보정</a:t>
-            </a:r>
-            <a:endParaRPr lang="en-US" sz="1400">
+              <a:t>회전</a:t>
+            </a:r>
+            <a:r>
+              <a:rPr lang="en-US" sz="1400" dirty="0">
+                <a:solidFill>
+                  <a:srgbClr val="E8EBF2"/>
+                </a:solidFill>
+                <a:latin typeface="맑은 고딕"/>
+                <a:ea typeface="맑은 고딕"/>
+                <a:cs typeface="맑은 고딕"/>
+              </a:rPr>
+              <a:t> 시 </a:t>
+            </a:r>
+            <a:r>
+              <a:rPr lang="en-US" sz="1400" dirty="0" err="1">
+                <a:solidFill>
+                  <a:srgbClr val="E8EBF2"/>
+                </a:solidFill>
+                <a:latin typeface="맑은 고딕"/>
+                <a:ea typeface="맑은 고딕"/>
+                <a:cs typeface="맑은 고딕"/>
+              </a:rPr>
+              <a:t>충돌</a:t>
+            </a:r>
+            <a:r>
+              <a:rPr lang="en-US" sz="1400" dirty="0">
+                <a:solidFill>
+                  <a:srgbClr val="E8EBF2"/>
+                </a:solidFill>
+                <a:latin typeface="맑은 고딕"/>
+                <a:ea typeface="맑은 고딕"/>
+                <a:cs typeface="맑은 고딕"/>
+              </a:rPr>
+              <a:t> </a:t>
+            </a:r>
+            <a:r>
+              <a:rPr lang="en-US" sz="1400" dirty="0" err="1">
+                <a:solidFill>
+                  <a:srgbClr val="E8EBF2"/>
+                </a:solidFill>
+                <a:latin typeface="맑은 고딕"/>
+                <a:ea typeface="맑은 고딕"/>
+                <a:cs typeface="맑은 고딕"/>
+              </a:rPr>
+              <a:t>보정</a:t>
+            </a:r>
+            <a:endParaRPr lang="en-US" sz="1400" dirty="0">
               <a:solidFill>
-                <a:srgbClr val="e8ebf2"/>
+                <a:srgbClr val="E8EBF2"/>
               </a:solidFill>
               <a:latin typeface="맑은 고딕"/>
               <a:ea typeface="맑은 고딕"/>
@@ -9938,19 +11066,74 @@
               <a:defRPr/>
             </a:pPr>
             <a:r>
-              <a:rPr lang="en-US" sz="1400">
-                <a:solidFill>
-                  <a:srgbClr val="e8ebf2"/>
+              <a:rPr lang="en-US" sz="1400" dirty="0">
+                <a:solidFill>
+                  <a:srgbClr val="E8EBF2"/>
                 </a:solidFill>
                 <a:latin typeface="맑은 고딕"/>
                 <a:ea typeface="맑은 고딕"/>
                 <a:cs typeface="맑은 고딕"/>
               </a:rPr>
-              <a:t>(월 킥) 처리가 가장 까다로움</a:t>
-            </a:r>
-            <a:endParaRPr lang="en-US" sz="1400">
+              <a:t>(월 킥) </a:t>
+            </a:r>
+            <a:r>
+              <a:rPr lang="en-US" sz="1400" dirty="0" err="1">
+                <a:solidFill>
+                  <a:srgbClr val="E8EBF2"/>
+                </a:solidFill>
+                <a:latin typeface="맑은 고딕"/>
+                <a:ea typeface="맑은 고딕"/>
+                <a:cs typeface="맑은 고딕"/>
+              </a:rPr>
+              <a:t>처리가</a:t>
+            </a:r>
+            <a:r>
+              <a:rPr lang="en-US" sz="1400" dirty="0">
+                <a:solidFill>
+                  <a:srgbClr val="E8EBF2"/>
+                </a:solidFill>
+                <a:latin typeface="맑은 고딕"/>
+                <a:ea typeface="맑은 고딕"/>
+                <a:cs typeface="맑은 고딕"/>
+              </a:rPr>
+              <a:t> </a:t>
+            </a:r>
+            <a:r>
+              <a:rPr lang="en-US" sz="1400" dirty="0" err="1">
+                <a:solidFill>
+                  <a:srgbClr val="E8EBF2"/>
+                </a:solidFill>
+                <a:latin typeface="맑은 고딕"/>
+                <a:ea typeface="맑은 고딕"/>
+                <a:cs typeface="맑은 고딕"/>
+              </a:rPr>
+              <a:t>가장</a:t>
+            </a:r>
+            <a:r>
+              <a:rPr lang="en-US" sz="1400" dirty="0">
+                <a:solidFill>
+                  <a:srgbClr val="E8EBF2"/>
+                </a:solidFill>
+                <a:latin typeface="맑은 고딕"/>
+                <a:ea typeface="맑은 고딕"/>
+                <a:cs typeface="맑은 고딕"/>
+              </a:rPr>
+              <a:t> </a:t>
+            </a:r>
+            <a:r>
+              <a:rPr lang="en-US" sz="1400" dirty="0" err="1">
+                <a:solidFill>
+                  <a:srgbClr val="E8EBF2"/>
+                </a:solidFill>
+                <a:latin typeface="맑은 고딕"/>
+                <a:ea typeface="맑은 고딕"/>
+                <a:cs typeface="맑은 고딕"/>
+              </a:rPr>
+              <a:t>까다로움</a:t>
+            </a:r>
+            <a:endParaRPr lang="en-US" sz="1400" dirty="0">
               <a:solidFill>
-                <a:srgbClr val="e8ebf2"/>
+                <a:srgbClr val="E8EBF2"/>
               </a:solidFill>
               <a:latin typeface="맑은 고딕"/>
               <a:ea typeface="맑은 고딕"/>
@@ -9970,20 +11153,20 @@
               <a:defRPr/>
             </a:pPr>
             <a:r>
-              <a:rPr lang="en-US" sz="1400">
-                <a:solidFill>
-                  <a:srgbClr val="e8ebf2"/>
+              <a:rPr lang="en-US" sz="1400" dirty="0" err="1">
+                <a:solidFill>
+                  <a:srgbClr val="E8EBF2"/>
                 </a:solidFill>
                 <a:latin typeface="맑은 고딕"/>
                 <a:ea typeface="맑은 고딕"/>
                 <a:cs typeface="맑은 고딕"/>
               </a:rPr>
-              <a:t>이벤트·게임 루프의</a:t>
-            </a:r>
-            <a:r>
-              <a:rPr lang="ko-KR" altLang="en-US" sz="1400">
-                <a:solidFill>
-                  <a:srgbClr val="e8ebf2"/>
+              <a:t>이벤트·게임</a:t>
+            </a:r>
+            <a:r>
+              <a:rPr lang="en-US" sz="1400" dirty="0">
+                <a:solidFill>
+                  <a:srgbClr val="E8EBF2"/>
                 </a:solidFill>
                 <a:latin typeface="맑은 고딕"/>
                 <a:ea typeface="맑은 고딕"/>
@@ -9992,154 +11175,69 @@
               <a:t> </a:t>
             </a:r>
             <a:r>
-              <a:rPr lang="en-US" sz="1400">
-                <a:solidFill>
-                  <a:srgbClr val="e8ebf2"/>
+              <a:rPr lang="en-US" sz="1400" dirty="0" err="1">
+                <a:solidFill>
+                  <a:srgbClr val="E8EBF2"/>
                 </a:solidFill>
                 <a:latin typeface="맑은 고딕"/>
                 <a:ea typeface="맑은 고딕"/>
                 <a:cs typeface="맑은 고딕"/>
               </a:rPr>
-              <a:t>상태 관리</a:t>
-            </a:r>
-            <a:endParaRPr lang="en-US" sz="1400">
+              <a:t>루프의</a:t>
+            </a:r>
+            <a:r>
+              <a:rPr lang="ko-KR" altLang="en-US" sz="1400" dirty="0">
+                <a:solidFill>
+                  <a:srgbClr val="E8EBF2"/>
+                </a:solidFill>
+                <a:latin typeface="맑은 고딕"/>
+                <a:ea typeface="맑은 고딕"/>
+                <a:cs typeface="맑은 고딕"/>
+              </a:rPr>
+              <a:t> </a:t>
+            </a:r>
+            <a:r>
+              <a:rPr lang="en-US" sz="1400" dirty="0" err="1">
+                <a:solidFill>
+                  <a:srgbClr val="E8EBF2"/>
+                </a:solidFill>
+                <a:latin typeface="맑은 고딕"/>
+                <a:ea typeface="맑은 고딕"/>
+                <a:cs typeface="맑은 고딕"/>
+              </a:rPr>
+              <a:t>상태</a:t>
+            </a:r>
+            <a:r>
+              <a:rPr lang="en-US" sz="1400" dirty="0">
+                <a:solidFill>
+                  <a:srgbClr val="E8EBF2"/>
+                </a:solidFill>
+                <a:latin typeface="맑은 고딕"/>
+                <a:ea typeface="맑은 고딕"/>
+                <a:cs typeface="맑은 고딕"/>
+              </a:rPr>
+              <a:t> </a:t>
+            </a:r>
+            <a:r>
+              <a:rPr lang="en-US" sz="1400" dirty="0" err="1">
+                <a:solidFill>
+                  <a:srgbClr val="E8EBF2"/>
+                </a:solidFill>
+                <a:latin typeface="맑은 고딕"/>
+                <a:ea typeface="맑은 고딕"/>
+                <a:cs typeface="맑은 고딕"/>
+              </a:rPr>
+              <a:t>관리</a:t>
+            </a:r>
+            <a:endParaRPr lang="en-US" sz="1400" dirty="0">
               <a:solidFill>
-                <a:srgbClr val="e8ebf2"/>
+                <a:srgbClr val="E8EBF2"/>
               </a:solidFill>
               <a:latin typeface="맑은 고딕"/>
               <a:ea typeface="맑은 고딕"/>
               <a:cs typeface="맑은 고딕"/>
             </a:endParaRPr>
           </a:p>
-        </p:txBody>
-      </p:sp>
-      <p:sp>
-        <p:nvSpPr>
-          <p:cNvPr id="17" name="Shape 15"/>
-          <p:cNvSpPr/>
-          <p:nvPr/>
-        </p:nvSpPr>
-        <p:spPr>
-          <a:xfrm>
-            <a:off x="8101584" y="1508760"/>
-            <a:ext cx="3456432" cy="3291840"/>
-          </a:xfrm>
-          <a:prstGeom prst="roundRect">
-            <a:avLst>
-              <a:gd name="adj" fmla="val 2222"/>
-            </a:avLst>
-          </a:prstGeom>
-          <a:solidFill>
-            <a:srgbClr val="1a1f2b"/>
-          </a:solidFill>
-          <a:ln/>
-          <a:effectLst>
-            <a:outerShdw blurRad="114300" dist="38100" dir="8100000" algn="bl" rotWithShape="0">
-              <a:srgbClr val="000000">
-                <a:alpha val="35000"/>
-              </a:srgbClr>
-            </a:outerShdw>
-          </a:effectLst>
-        </p:spPr>
-        <p:txBody>
-          <a:bodyPr anchor="ctr"/>
-          <a:p>
-            <a:pPr algn="ctr">
-              <a:defRPr/>
-            </a:pPr>
-            <a:endParaRPr lang="ko-KR" altLang="en-US"/>
-          </a:p>
-        </p:txBody>
-      </p:sp>
-      <p:sp>
-        <p:nvSpPr>
-          <p:cNvPr id="18" name="Shape 16"/>
-          <p:cNvSpPr/>
-          <p:nvPr/>
-        </p:nvSpPr>
-        <p:spPr>
-          <a:xfrm>
-            <a:off x="8101584" y="1508760"/>
-            <a:ext cx="3456432" cy="109728"/>
-          </a:xfrm>
-          <a:prstGeom prst="rect">
-            <a:avLst/>
-          </a:prstGeom>
-          <a:solidFill>
-            <a:srgbClr val="8c03e7"/>
-          </a:solidFill>
-          <a:ln/>
-        </p:spPr>
-        <p:txBody>
-          <a:bodyPr anchor="ctr"/>
-          <a:p>
-            <a:pPr algn="ctr">
-              <a:defRPr/>
-            </a:pPr>
-            <a:endParaRPr lang="ko-KR" altLang="en-US"/>
-          </a:p>
-        </p:txBody>
-      </p:sp>
-      <p:sp>
-        <p:nvSpPr>
-          <p:cNvPr id="19" name="Text 17"/>
-          <p:cNvSpPr/>
-          <p:nvPr/>
-        </p:nvSpPr>
-        <p:spPr>
-          <a:xfrm>
-            <a:off x="8421624" y="1828800"/>
-            <a:ext cx="2816352" cy="457200"/>
-          </a:xfrm>
-          <a:prstGeom prst="rect">
-            <a:avLst/>
-          </a:prstGeom>
-          <a:noFill/>
-          <a:ln/>
-        </p:spPr>
-        <p:txBody>
-          <a:bodyPr wrap="square" lIns="0" tIns="0" rIns="0" bIns="0" anchor="ctr"/>
-          <a:lstStyle/>
-          <a:p>
-            <a:pPr marL="0" indent="0">
-              <a:buNone/>
-              <a:defRPr/>
-            </a:pPr>
-            <a:r>
-              <a:rPr lang="en-US" sz="1900" b="1">
-                <a:solidFill>
-                  <a:srgbClr val="e8ebf2"/>
-                </a:solidFill>
-                <a:latin typeface="맑은 고딕"/>
-                <a:ea typeface="맑은 고딕"/>
-                <a:cs typeface="맑은 고딕"/>
-              </a:rPr>
-              <a:t>개선하고 싶은 점</a:t>
-            </a:r>
-            <a:endParaRPr lang="en-US" sz="1900"/>
-          </a:p>
-        </p:txBody>
-      </p:sp>
-      <p:sp>
-        <p:nvSpPr>
-          <p:cNvPr id="20" name="Text 18"/>
-          <p:cNvSpPr/>
-          <p:nvPr/>
-        </p:nvSpPr>
-        <p:spPr>
-          <a:xfrm>
-            <a:off x="8421624" y="2468880"/>
-            <a:ext cx="2907792" cy="2103120"/>
-          </a:xfrm>
-          <a:prstGeom prst="rect">
-            <a:avLst/>
-          </a:prstGeom>
-          <a:noFill/>
-          <a:ln/>
-        </p:spPr>
-        <p:txBody>
-          <a:bodyPr wrap="square" lIns="0" tIns="0" rIns="0" bIns="0" anchor="t"/>
-          <a:lstStyle/>
           <a:p>
             <a:pPr marL="177800" indent="-177800">
               <a:lnSpc>
@@ -10153,25 +11251,156 @@
               <a:defRPr/>
             </a:pPr>
             <a:r>
-              <a:rPr lang="en-US" sz="1400">
-                <a:solidFill>
-                  <a:srgbClr val="e8ebf2"/>
+              <a:rPr lang="ko-KR" altLang="en-US" sz="1400" dirty="0">
+                <a:solidFill>
+                  <a:srgbClr val="E8EBF2"/>
                 </a:solidFill>
                 <a:latin typeface="맑은 고딕"/>
                 <a:ea typeface="맑은 고딕"/>
                 <a:cs typeface="맑은 고딕"/>
               </a:rPr>
-              <a:t>홀드(x) 기능 완성</a:t>
-            </a:r>
-            <a:endParaRPr lang="en-US" sz="1400">
+              <a:t>알고리즘의 구현 그 자체</a:t>
+            </a:r>
+            <a:endParaRPr lang="en-US" sz="1400" dirty="0">
               <a:solidFill>
-                <a:srgbClr val="e8ebf2"/>
+                <a:srgbClr val="E8EBF2"/>
               </a:solidFill>
               <a:latin typeface="맑은 고딕"/>
               <a:ea typeface="맑은 고딕"/>
               <a:cs typeface="맑은 고딕"/>
             </a:endParaRPr>
           </a:p>
+        </p:txBody>
+      </p:sp>
+      <p:sp>
+        <p:nvSpPr>
+          <p:cNvPr id="17" name="Shape 15"/>
+          <p:cNvSpPr/>
+          <p:nvPr/>
+        </p:nvSpPr>
+        <p:spPr>
+          <a:xfrm>
+            <a:off x="8101584" y="1508760"/>
+            <a:ext cx="3456432" cy="3291840"/>
+          </a:xfrm>
+          <a:prstGeom prst="roundRect">
+            <a:avLst>
+              <a:gd name="adj" fmla="val 2222"/>
+            </a:avLst>
+          </a:prstGeom>
+          <a:solidFill>
+            <a:srgbClr val="1A1F2B"/>
+          </a:solidFill>
+          <a:ln/>
+          <a:effectLst>
+            <a:outerShdw blurRad="114300" dist="38100" dir="8100000" algn="bl" rotWithShape="0">
+              <a:srgbClr val="000000">
+                <a:alpha val="35000"/>
+              </a:srgbClr>
+            </a:outerShdw>
+          </a:effectLst>
+        </p:spPr>
+        <p:txBody>
+          <a:bodyPr anchor="ctr"/>
+          <a:lstStyle/>
+          <a:p>
+            <a:pPr algn="ctr">
+              <a:defRPr/>
+            </a:pPr>
+            <a:endParaRPr lang="ko-KR" altLang="en-US"/>
+          </a:p>
+        </p:txBody>
+      </p:sp>
+      <p:sp>
+        <p:nvSpPr>
+          <p:cNvPr id="18" name="Shape 16"/>
+          <p:cNvSpPr/>
+          <p:nvPr/>
+        </p:nvSpPr>
+        <p:spPr>
+          <a:xfrm>
+            <a:off x="8101584" y="1508760"/>
+            <a:ext cx="3456432" cy="109728"/>
+          </a:xfrm>
+          <a:prstGeom prst="rect">
+            <a:avLst/>
+          </a:prstGeom>
+          <a:solidFill>
+            <a:srgbClr val="8C03E7"/>
+          </a:solidFill>
+          <a:ln/>
+        </p:spPr>
+        <p:txBody>
+          <a:bodyPr anchor="ctr"/>
+          <a:lstStyle/>
+          <a:p>
+            <a:pPr algn="ctr">
+              <a:defRPr/>
+            </a:pPr>
+            <a:endParaRPr lang="ko-KR" altLang="en-US"/>
+          </a:p>
+        </p:txBody>
+      </p:sp>
+      <p:sp>
+        <p:nvSpPr>
+          <p:cNvPr id="19" name="Text 17"/>
+          <p:cNvSpPr/>
+          <p:nvPr/>
+        </p:nvSpPr>
+        <p:spPr>
+          <a:xfrm>
+            <a:off x="8421624" y="1828800"/>
+            <a:ext cx="2816352" cy="457200"/>
+          </a:xfrm>
+          <a:prstGeom prst="rect">
+            <a:avLst/>
+          </a:prstGeom>
+          <a:noFill/>
+          <a:ln/>
+        </p:spPr>
+        <p:txBody>
+          <a:bodyPr wrap="square" lIns="0" tIns="0" rIns="0" bIns="0" anchor="ctr"/>
+          <a:lstStyle/>
+          <a:p>
+            <a:pPr marL="0" indent="0">
+              <a:buNone/>
+              <a:defRPr/>
+            </a:pPr>
+            <a:r>
+              <a:rPr lang="en-US" sz="1900" b="1">
+                <a:solidFill>
+                  <a:srgbClr val="E8EBF2"/>
+                </a:solidFill>
+                <a:latin typeface="맑은 고딕"/>
+                <a:ea typeface="맑은 고딕"/>
+                <a:cs typeface="맑은 고딕"/>
+              </a:rPr>
+              <a:t>개선하고 싶은 점</a:t>
+            </a:r>
+            <a:endParaRPr lang="en-US" sz="1900"/>
+          </a:p>
+        </p:txBody>
+      </p:sp>
+      <p:sp>
+        <p:nvSpPr>
+          <p:cNvPr id="20" name="Text 18"/>
+          <p:cNvSpPr/>
+          <p:nvPr/>
+        </p:nvSpPr>
+        <p:spPr>
+          <a:xfrm>
+            <a:off x="8421624" y="2468880"/>
+            <a:ext cx="2907792" cy="2103120"/>
+          </a:xfrm>
+          <a:prstGeom prst="rect">
+            <a:avLst/>
+          </a:prstGeom>
+          <a:noFill/>
+          <a:ln/>
+        </p:spPr>
+        <p:txBody>
+          <a:bodyPr wrap="square" lIns="0" tIns="0" rIns="0" bIns="0" anchor="t"/>
+          <a:lstStyle/>
           <a:p>
             <a:pPr marL="177800" indent="-177800">
               <a:lnSpc>
@@ -10187,22 +11416,14 @@
             <a:r>
               <a:rPr lang="en-US" sz="1400">
                 <a:solidFill>
-                  <a:srgbClr val="e8ebf2"/>
+                  <a:srgbClr val="E8EBF2"/>
                 </a:solidFill>
                 <a:latin typeface="맑은 고딕"/>
                 <a:ea typeface="맑은 고딕"/>
                 <a:cs typeface="맑은 고딕"/>
               </a:rPr>
-              <a:t>점수·레벨 UI 연동 +</a:t>
-            </a:r>
-            <a:endParaRPr lang="en-US" sz="1400">
-              <a:solidFill>
-                <a:srgbClr val="e8ebf2"/>
-              </a:solidFill>
-              <a:latin typeface="맑은 고딕"/>
-              <a:ea typeface="맑은 고딕"/>
-              <a:cs typeface="맑은 고딕"/>
-            </a:endParaRPr>
+              <a:t>홀드(x) 기능 완성</a:t>
+            </a:r>
           </a:p>
           <a:p>
             <a:pPr marL="177800" indent="-177800">
@@ -10217,35 +11438,16 @@
               <a:defRPr/>
             </a:pPr>
             <a:r>
-              <a:rPr lang="ko-KR" altLang="en-US" sz="1400">
-                <a:solidFill>
-                  <a:srgbClr val="e8ebf2"/>
+              <a:rPr lang="en-US" sz="1400">
+                <a:solidFill>
+                  <a:srgbClr val="E8EBF2"/>
                 </a:solidFill>
                 <a:latin typeface="맑은 고딕"/>
                 <a:ea typeface="맑은 고딕"/>
                 <a:cs typeface="맑은 고딕"/>
               </a:rPr>
-              <a:t>레벨당 </a:t>
-            </a:r>
-            <a:r>
-              <a:rPr lang="en-US" sz="1400">
-                <a:solidFill>
-                  <a:srgbClr val="e8ebf2"/>
-                </a:solidFill>
-                <a:latin typeface="맑은 고딕"/>
-                <a:ea typeface="맑은 고딕"/>
-                <a:cs typeface="맑은 고딕"/>
-              </a:rPr>
-              <a:t>속도 증가, 게임 오버 처리</a:t>
-            </a:r>
-            <a:endParaRPr lang="en-US" sz="1400">
-              <a:solidFill>
-                <a:srgbClr val="e8ebf2"/>
-              </a:solidFill>
-              <a:latin typeface="맑은 고딕"/>
-              <a:ea typeface="맑은 고딕"/>
-              <a:cs typeface="맑은 고딕"/>
-            </a:endParaRPr>
+              <a:t>점수·레벨 UI 연동 +</a:t>
+            </a:r>
           </a:p>
           <a:p>
             <a:pPr marL="177800" indent="-177800">
@@ -10260,35 +11462,27 @@
               <a:defRPr/>
             </a:pPr>
             <a:r>
-              <a:rPr lang="en-US" altLang="ko-KR" sz="1400">
-                <a:solidFill>
-                  <a:srgbClr val="e8ebf2"/>
+              <a:rPr lang="ko-KR" altLang="en-US" sz="1400">
+                <a:solidFill>
+                  <a:srgbClr val="E8EBF2"/>
                 </a:solidFill>
                 <a:latin typeface="맑은 고딕"/>
                 <a:ea typeface="맑은 고딕"/>
                 <a:cs typeface="맑은 고딕"/>
               </a:rPr>
-              <a:t>push</a:t>
-            </a:r>
-            <a:r>
-              <a:rPr lang="ko-KR" altLang="en-US" sz="1400">
-                <a:solidFill>
-                  <a:srgbClr val="e8ebf2"/>
+              <a:t>레벨당 </a:t>
+            </a:r>
+            <a:r>
+              <a:rPr lang="en-US" sz="1400">
+                <a:solidFill>
+                  <a:srgbClr val="E8EBF2"/>
                 </a:solidFill>
                 <a:latin typeface="맑은 고딕"/>
                 <a:ea typeface="맑은 고딕"/>
                 <a:cs typeface="맑은 고딕"/>
               </a:rPr>
-              <a:t> 멈춤 기능</a:t>
-            </a:r>
-            <a:endParaRPr lang="ko-KR" altLang="en-US" sz="1400">
-              <a:solidFill>
-                <a:srgbClr val="e8ebf2"/>
-              </a:solidFill>
-              <a:latin typeface="맑은 고딕"/>
-              <a:ea typeface="맑은 고딕"/>
-              <a:cs typeface="맑은 고딕"/>
-            </a:endParaRPr>
+              <a:t>속도 증가, 게임 오버 처리</a:t>
+            </a:r>
           </a:p>
           <a:p>
             <a:pPr marL="177800" indent="-177800">
@@ -10305,55 +11499,82 @@
             <a:r>
               <a:rPr lang="en-US" altLang="ko-KR" sz="1400">
                 <a:solidFill>
-                  <a:srgbClr val="e8ebf2"/>
+                  <a:srgbClr val="E8EBF2"/>
                 </a:solidFill>
                 <a:latin typeface="맑은 고딕"/>
                 <a:ea typeface="맑은 고딕"/>
                 <a:cs typeface="맑은 고딕"/>
               </a:rPr>
-              <a:t>2</a:t>
+              <a:t>push</a:t>
             </a:r>
             <a:r>
               <a:rPr lang="ko-KR" altLang="en-US" sz="1400">
                 <a:solidFill>
-                  <a:srgbClr val="e8ebf2"/>
+                  <a:srgbClr val="E8EBF2"/>
                 </a:solidFill>
                 <a:latin typeface="맑은 고딕"/>
                 <a:ea typeface="맑은 고딕"/>
                 <a:cs typeface="맑은 고딕"/>
               </a:rPr>
-              <a:t>인용</a:t>
-            </a:r>
+              <a:t> 멈춤 기능</a:t>
+            </a:r>
+          </a:p>
+          <a:p>
+            <a:pPr marL="177800" indent="-177800">
+              <a:lnSpc>
+                <a:spcPct val="115000"/>
+              </a:lnSpc>
+              <a:spcAft>
+                <a:spcPts val="1000"/>
+              </a:spcAft>
+              <a:buSzPct val="100000"/>
+              <a:buChar char="•"/>
+              <a:defRPr/>
+            </a:pPr>
             <a:r>
               <a:rPr lang="en-US" altLang="ko-KR" sz="1400">
                 <a:solidFill>
-                  <a:srgbClr val="e8ebf2"/>
+                  <a:srgbClr val="E8EBF2"/>
                 </a:solidFill>
                 <a:latin typeface="맑은 고딕"/>
                 <a:ea typeface="맑은 고딕"/>
                 <a:cs typeface="맑은 고딕"/>
               </a:rPr>
-              <a:t> or</a:t>
+              <a:t>2</a:t>
             </a:r>
             <a:r>
               <a:rPr lang="ko-KR" altLang="en-US" sz="1400">
                 <a:solidFill>
-                  <a:srgbClr val="e8ebf2"/>
+                  <a:srgbClr val="E8EBF2"/>
                 </a:solidFill>
                 <a:latin typeface="맑은 고딕"/>
                 <a:ea typeface="맑은 고딕"/>
                 <a:cs typeface="맑은 고딕"/>
               </a:rPr>
+              <a:t>인용</a:t>
+            </a:r>
+            <a:r>
+              <a:rPr lang="en-US" altLang="ko-KR" sz="1400">
+                <a:solidFill>
+                  <a:srgbClr val="E8EBF2"/>
+                </a:solidFill>
+                <a:latin typeface="맑은 고딕"/>
+                <a:ea typeface="맑은 고딕"/>
+                <a:cs typeface="맑은 고딕"/>
+              </a:rPr>
+              <a:t> or</a:t>
+            </a:r>
+            <a:r>
+              <a:rPr lang="ko-KR" altLang="en-US" sz="1400">
+                <a:solidFill>
+                  <a:srgbClr val="E8EBF2"/>
+                </a:solidFill>
+                <a:latin typeface="맑은 고딕"/>
+                <a:ea typeface="맑은 고딕"/>
+                <a:cs typeface="맑은 고딕"/>
+              </a:rPr>
               <a:t> 멀티 대전 기능</a:t>
             </a:r>
-            <a:endParaRPr lang="ko-KR" altLang="en-US" sz="1400">
-              <a:solidFill>
-                <a:srgbClr val="e8ebf2"/>
-              </a:solidFill>
-              <a:latin typeface="맑은 고딕"/>
-              <a:ea typeface="맑은 고딕"/>
-              <a:cs typeface="맑은 고딕"/>
-            </a:endParaRPr>
           </a:p>
         </p:txBody>
       </p:sp>
@@ -10374,7 +11595,7 @@
             </a:avLst>
           </a:prstGeom>
           <a:solidFill>
-            <a:srgbClr val="232a3b"/>
+            <a:srgbClr val="232A3B"/>
           </a:solidFill>
           <a:ln/>
           <a:effectLst>
@@ -10387,6 +11608,7 @@
         </p:spPr>
         <p:txBody>
           <a:bodyPr anchor="ctr"/>
+          <a:lstStyle/>
           <a:p>
             <a:pPr algn="ctr">
               <a:defRPr/>
@@ -10410,12 +11632,13 @@
             <a:avLst/>
           </a:prstGeom>
           <a:solidFill>
-            <a:srgbClr val="4ec1ff"/>
+            <a:srgbClr val="4EC1FF"/>
           </a:solidFill>
           <a:ln/>
         </p:spPr>
         <p:txBody>
           <a:bodyPr anchor="ctr"/>
+          <a:lstStyle/>
           <a:p>
             <a:pPr algn="ctr">
               <a:defRPr/>
@@ -10439,12 +11662,13 @@
             <a:avLst/>
           </a:prstGeom>
           <a:solidFill>
-            <a:srgbClr val="4ec1ff"/>
+            <a:srgbClr val="4EC1FF"/>
           </a:solidFill>
           <a:ln/>
         </p:spPr>
         <p:txBody>
           <a:bodyPr anchor="ctr"/>
+          <a:lstStyle/>
           <a:p>
             <a:pPr algn="ctr">
               <a:defRPr/>
@@ -10468,12 +11692,13 @@
             <a:avLst/>
           </a:prstGeom>
           <a:solidFill>
-            <a:srgbClr val="4ec1ff"/>
+            <a:srgbClr val="4EC1FF"/>
           </a:solidFill>
           <a:ln/>
         </p:spPr>
         <p:txBody>
           <a:bodyPr anchor="ctr"/>
+          <a:lstStyle/>
           <a:p>
             <a:pPr algn="ctr">
               <a:defRPr/>
@@ -10497,12 +11722,13 @@
             <a:avLst/>
           </a:prstGeom>
           <a:solidFill>
-            <a:srgbClr val="4ec1ff"/>
+            <a:srgbClr val="4EC1FF"/>
           </a:solidFill>
           <a:ln/>
         </p:spPr>
         <p:txBody>
           <a:bodyPr anchor="ctr"/>
+          <a:lstStyle/>
           <a:p>
             <a:pPr algn="ctr">
               <a:defRPr/>
@@ -10539,7 +11765,7 @@
             <a:r>
               <a:rPr lang="en-US" sz="2200" b="1">
                 <a:solidFill>
-                  <a:srgbClr val="4ec1ff"/>
+                  <a:srgbClr val="4EC1FF"/>
                 </a:solidFill>
                 <a:latin typeface="맑은 고딕"/>
                 <a:ea typeface="맑은 고딕"/>
@@ -10556,11 +11782,11 @@
   <p:clrMapOvr>
     <a:masterClrMapping/>
   </p:clrMapOvr>
-  <mc:AlternateContent xmlns:mc="http://schemas.openxmlformats.org/markup-compatibility/2006">
-    <mc:Choice xmlns:p14="http://schemas.microsoft.com/office/powerpoint/2010/main" Requires="p14">
-      <p:transition xmlns:mc="http://schemas.openxmlformats.org/markup-compatibility/2006" xmlns:p14="http://schemas.microsoft.com/office/powerpoint/2010/main" mc:Ignorable="p14" p14:dur="500"/>
+  <mc:AlternateContent xmlns:mc="http://schemas.openxmlformats.org/markup-compatibility/2006" xmlns:p14="http://schemas.microsoft.com/office/powerpoint/2010/main">
+    <mc:Choice Requires="p14">
+      <p:transition/>
     </mc:Choice>
-    <mc:Fallback>
+    <mc:Fallback xmlns:dsp="http://schemas.microsoft.com/office/drawing/2008/diagram" xmlns:dgm="http://schemas.openxmlformats.org/drawingml/2006/diagram" xmlns:c="http://schemas.openxmlformats.org/drawingml/2006/chart" xmlns="">
       <p:transition/>
     </mc:Fallback>
   </mc:AlternateContent>
@@ -10863,44 +12089,44 @@
 </file>
 
 <file path=ppt/theme/theme2.xml><?xml version="1.0" encoding="utf-8"?>
-<a:theme xmlns:r="http://schemas.openxmlformats.org/officeDocument/2006/relationships" xmlns:c="http://schemas.openxmlformats.org/drawingml/2006/chart" xmlns:dgm="http://schemas.openxmlformats.org/drawingml/2006/diagram" xmlns:dsp="http://schemas.microsoft.com/office/drawing/2008/diagram" xmlns:a="http://schemas.openxmlformats.org/drawingml/2006/main" xmlns:pic="http://schemas.openxmlformats.org/drawingml/2006/picture" xmlns:wp="http://schemas.openxmlformats.org/drawingml/2006/wordprocessingDrawing" xmlns:xdr="http://schemas.openxmlformats.org/drawingml/2006/spreadsheetDrawing" xmlns:lc="http://schemas.openxmlformats.org/drawingml/2006/lockedCanvas" xmlns:p="http://schemas.openxmlformats.org/presentationml/2006/main" name="Office Theme">
+<a:theme xmlns:a="http://schemas.openxmlformats.org/drawingml/2006/main" name="Office Theme">
   <a:themeElements>
     <a:clrScheme name="Office">
       <a:dk1>
         <a:sysClr val="windowText" lastClr="000000"/>
       </a:dk1>
       <a:lt1>
-        <a:sysClr val="window" lastClr="ffffff"/>
+        <a:sysClr val="window" lastClr="FFFFFF"/>
       </a:lt1>
       <a:dk2>
-        <a:srgbClr val="44546a"/>
+        <a:srgbClr val="44546A"/>
       </a:dk2>
       <a:lt2>
-        <a:srgbClr val="e7e6e6"/>
+        <a:srgbClr val="E7E6E6"/>
       </a:lt2>
       <a:accent1>
-        <a:srgbClr val="4472c4"/>
+        <a:srgbClr val="4472C4"/>
       </a:accent1>
       <a:accent2>
-        <a:srgbClr val="ed7d31"/>
+        <a:srgbClr val="ED7D31"/>
       </a:accent2>
       <a:accent3>
-        <a:srgbClr val="a5a5a5"/>
+        <a:srgbClr val="A5A5A5"/>
       </a:accent3>
       <a:accent4>
-        <a:srgbClr val="ffc000"/>
+        <a:srgbClr val="FFC000"/>
       </a:accent4>
       <a:accent5>
-        <a:srgbClr val="5b9bd5"/>
+        <a:srgbClr val="5B9BD5"/>
       </a:accent5>
       <a:accent6>
-        <a:srgbClr val="70ad47"/>
+        <a:srgbClr val="70AD47"/>
       </a:accent6>
       <a:hlink>
-        <a:srgbClr val="0563c1"/>
+        <a:srgbClr val="0563C1"/>
       </a:hlink>
       <a:folHlink>
-        <a:srgbClr val="954f72"/>
+        <a:srgbClr val="954F72"/>
       </a:folHlink>
     </a:clrScheme>
     <a:fontScheme name="Office">
@@ -11147,5 +12373,7 @@
       </a:bgFillStyleLst>
     </a:fmtScheme>
   </a:themeElements>
+  <a:objectDefaults/>
+  <a:extraClrSchemeLst/>
 </a:theme>
 </file>